--- a/AzureDevOps/PPT/Azure-DevOps Overview.pptx
+++ b/AzureDevOps/PPT/Azure-DevOps Overview.pptx
@@ -7,19 +7,17 @@
   </p:sldMasterIdLst>
   <p:sldIdLst>
     <p:sldId id="308" r:id="rId3"/>
-    <p:sldId id="310" r:id="rId4"/>
-    <p:sldId id="311" r:id="rId5"/>
-    <p:sldId id="312" r:id="rId6"/>
-    <p:sldId id="313" r:id="rId7"/>
-    <p:sldId id="314" r:id="rId8"/>
-    <p:sldId id="315" r:id="rId9"/>
-    <p:sldId id="309" r:id="rId10"/>
-    <p:sldId id="316" r:id="rId11"/>
-    <p:sldId id="317" r:id="rId12"/>
-    <p:sldId id="318" r:id="rId13"/>
-    <p:sldId id="319" r:id="rId14"/>
-    <p:sldId id="320" r:id="rId15"/>
-    <p:sldId id="321" r:id="rId16"/>
+    <p:sldId id="314" r:id="rId4"/>
+    <p:sldId id="315" r:id="rId5"/>
+    <p:sldId id="311" r:id="rId6"/>
+    <p:sldId id="312" r:id="rId7"/>
+    <p:sldId id="309" r:id="rId8"/>
+    <p:sldId id="316" r:id="rId9"/>
+    <p:sldId id="317" r:id="rId10"/>
+    <p:sldId id="318" r:id="rId11"/>
+    <p:sldId id="319" r:id="rId12"/>
+    <p:sldId id="320" r:id="rId13"/>
+    <p:sldId id="321" r:id="rId14"/>
   </p:sldIdLst>
   <p:sldSz cx="12192000" cy="6858000"/>
   <p:notesSz cx="6858000" cy="9144000"/>
@@ -273,7 +271,7 @@
           <a:p>
             <a:fld id="{0F1FE75B-83A8-4745-BB88-D0923493E807}" type="datetimeFigureOut">
               <a:rPr lang="en-US" smtClean="0"/>
-              <a:t>5/8/2025</a:t>
+              <a:t>8/13/2025</a:t>
             </a:fld>
             <a:endParaRPr lang="en-US"/>
           </a:p>
@@ -471,7 +469,7 @@
           <a:p>
             <a:fld id="{0F1FE75B-83A8-4745-BB88-D0923493E807}" type="datetimeFigureOut">
               <a:rPr lang="en-US" smtClean="0"/>
-              <a:t>5/8/2025</a:t>
+              <a:t>8/13/2025</a:t>
             </a:fld>
             <a:endParaRPr lang="en-US"/>
           </a:p>
@@ -679,7 +677,7 @@
           <a:p>
             <a:fld id="{0F1FE75B-83A8-4745-BB88-D0923493E807}" type="datetimeFigureOut">
               <a:rPr lang="en-US" smtClean="0"/>
-              <a:t>5/8/2025</a:t>
+              <a:t>8/13/2025</a:t>
             </a:fld>
             <a:endParaRPr lang="en-US"/>
           </a:p>
@@ -1042,7 +1040,7 @@
             <a:fld id="{1D8BD707-D9CF-40AE-B4C6-C98DA3205C09}" type="datetimeFigureOut">
               <a:rPr lang="en-US" smtClean="0"/>
               <a:pPr/>
-              <a:t>5/8/2025</a:t>
+              <a:t>8/13/2025</a:t>
             </a:fld>
             <a:endParaRPr lang="en-US"/>
           </a:p>
@@ -1192,7 +1190,7 @@
             <a:fld id="{1D8BD707-D9CF-40AE-B4C6-C98DA3205C09}" type="datetimeFigureOut">
               <a:rPr lang="en-US" smtClean="0"/>
               <a:pPr/>
-              <a:t>5/8/2025</a:t>
+              <a:t>8/13/2025</a:t>
             </a:fld>
             <a:endParaRPr lang="en-US"/>
           </a:p>
@@ -1614,7 +1612,7 @@
             <a:fld id="{1D8BD707-D9CF-40AE-B4C6-C98DA3205C09}" type="datetimeFigureOut">
               <a:rPr lang="en-US" smtClean="0"/>
               <a:pPr/>
-              <a:t>5/8/2025</a:t>
+              <a:t>8/13/2025</a:t>
             </a:fld>
             <a:endParaRPr lang="en-US"/>
           </a:p>
@@ -1862,7 +1860,7 @@
             <a:fld id="{1D8BD707-D9CF-40AE-B4C6-C98DA3205C09}" type="datetimeFigureOut">
               <a:rPr lang="en-US" smtClean="0"/>
               <a:pPr/>
-              <a:t>5/8/2025</a:t>
+              <a:t>8/13/2025</a:t>
             </a:fld>
             <a:endParaRPr lang="en-US"/>
           </a:p>
@@ -2104,7 +2102,7 @@
             <a:fld id="{1D8BD707-D9CF-40AE-B4C6-C98DA3205C09}" type="datetimeFigureOut">
               <a:rPr lang="en-US" smtClean="0"/>
               <a:pPr/>
-              <a:t>5/8/2025</a:t>
+              <a:t>8/13/2025</a:t>
             </a:fld>
             <a:endParaRPr lang="en-US"/>
           </a:p>
@@ -2305,7 +2303,7 @@
             <a:fld id="{1D8BD707-D9CF-40AE-B4C6-C98DA3205C09}" type="datetimeFigureOut">
               <a:rPr lang="en-US" smtClean="0"/>
               <a:pPr/>
-              <a:t>5/8/2025</a:t>
+              <a:t>8/13/2025</a:t>
             </a:fld>
             <a:endParaRPr lang="en-US"/>
           </a:p>
@@ -2410,7 +2408,7 @@
             <a:fld id="{1D8BD707-D9CF-40AE-B4C6-C98DA3205C09}" type="datetimeFigureOut">
               <a:rPr lang="en-US" smtClean="0"/>
               <a:pPr/>
-              <a:t>5/8/2025</a:t>
+              <a:t>8/13/2025</a:t>
             </a:fld>
             <a:endParaRPr lang="en-US"/>
           </a:p>
@@ -2552,7 +2550,7 @@
             <a:fld id="{1D8BD707-D9CF-40AE-B4C6-C98DA3205C09}" type="datetimeFigureOut">
               <a:rPr lang="en-US" smtClean="0"/>
               <a:pPr/>
-              <a:t>5/8/2025</a:t>
+              <a:t>8/13/2025</a:t>
             </a:fld>
             <a:endParaRPr lang="en-US"/>
           </a:p>
@@ -2878,7 +2876,7 @@
           <a:p>
             <a:fld id="{0F1FE75B-83A8-4745-BB88-D0923493E807}" type="datetimeFigureOut">
               <a:rPr lang="en-US" smtClean="0"/>
-              <a:t>5/8/2025</a:t>
+              <a:t>8/13/2025</a:t>
             </a:fld>
             <a:endParaRPr lang="en-US"/>
           </a:p>
@@ -3274,7 +3272,7 @@
             <a:fld id="{1D8BD707-D9CF-40AE-B4C6-C98DA3205C09}" type="datetimeFigureOut">
               <a:rPr lang="en-US" smtClean="0"/>
               <a:pPr/>
-              <a:t>5/8/2025</a:t>
+              <a:t>8/13/2025</a:t>
             </a:fld>
             <a:endParaRPr lang="en-US"/>
           </a:p>
@@ -3500,7 +3498,7 @@
             <a:fld id="{1D8BD707-D9CF-40AE-B4C6-C98DA3205C09}" type="datetimeFigureOut">
               <a:rPr lang="en-US" smtClean="0"/>
               <a:pPr/>
-              <a:t>5/8/2025</a:t>
+              <a:t>8/13/2025</a:t>
             </a:fld>
             <a:endParaRPr lang="en-US"/>
           </a:p>
@@ -3691,7 +3689,7 @@
             <a:fld id="{1D8BD707-D9CF-40AE-B4C6-C98DA3205C09}" type="datetimeFigureOut">
               <a:rPr lang="en-US" smtClean="0"/>
               <a:pPr/>
-              <a:t>5/8/2025</a:t>
+              <a:t>8/13/2025</a:t>
             </a:fld>
             <a:endParaRPr lang="en-US"/>
           </a:p>
@@ -4100,7 +4098,7 @@
           <a:p>
             <a:fld id="{0F1FE75B-83A8-4745-BB88-D0923493E807}" type="datetimeFigureOut">
               <a:rPr lang="en-US" smtClean="0"/>
-              <a:t>5/8/2025</a:t>
+              <a:t>8/13/2025</a:t>
             </a:fld>
             <a:endParaRPr lang="en-US"/>
           </a:p>
@@ -4365,7 +4363,7 @@
           <a:p>
             <a:fld id="{0F1FE75B-83A8-4745-BB88-D0923493E807}" type="datetimeFigureOut">
               <a:rPr lang="en-US" smtClean="0"/>
-              <a:t>5/8/2025</a:t>
+              <a:t>8/13/2025</a:t>
             </a:fld>
             <a:endParaRPr lang="en-US"/>
           </a:p>
@@ -4777,7 +4775,7 @@
           <a:p>
             <a:fld id="{0F1FE75B-83A8-4745-BB88-D0923493E807}" type="datetimeFigureOut">
               <a:rPr lang="en-US" smtClean="0"/>
-              <a:t>5/8/2025</a:t>
+              <a:t>8/13/2025</a:t>
             </a:fld>
             <a:endParaRPr lang="en-US"/>
           </a:p>
@@ -4918,7 +4916,7 @@
           <a:p>
             <a:fld id="{0F1FE75B-83A8-4745-BB88-D0923493E807}" type="datetimeFigureOut">
               <a:rPr lang="en-US" smtClean="0"/>
-              <a:t>5/8/2025</a:t>
+              <a:t>8/13/2025</a:t>
             </a:fld>
             <a:endParaRPr lang="en-US"/>
           </a:p>
@@ -5031,7 +5029,7 @@
           <a:p>
             <a:fld id="{0F1FE75B-83A8-4745-BB88-D0923493E807}" type="datetimeFigureOut">
               <a:rPr lang="en-US" smtClean="0"/>
-              <a:t>5/8/2025</a:t>
+              <a:t>8/13/2025</a:t>
             </a:fld>
             <a:endParaRPr lang="en-US"/>
           </a:p>
@@ -5342,7 +5340,7 @@
           <a:p>
             <a:fld id="{0F1FE75B-83A8-4745-BB88-D0923493E807}" type="datetimeFigureOut">
               <a:rPr lang="en-US" smtClean="0"/>
-              <a:t>5/8/2025</a:t>
+              <a:t>8/13/2025</a:t>
             </a:fld>
             <a:endParaRPr lang="en-US"/>
           </a:p>
@@ -5630,7 +5628,7 @@
           <a:p>
             <a:fld id="{0F1FE75B-83A8-4745-BB88-D0923493E807}" type="datetimeFigureOut">
               <a:rPr lang="en-US" smtClean="0"/>
-              <a:t>5/8/2025</a:t>
+              <a:t>8/13/2025</a:t>
             </a:fld>
             <a:endParaRPr lang="en-US"/>
           </a:p>
@@ -5871,7 +5869,7 @@
           <a:p>
             <a:fld id="{0F1FE75B-83A8-4745-BB88-D0923493E807}" type="datetimeFigureOut">
               <a:rPr lang="en-US" smtClean="0"/>
-              <a:t>5/8/2025</a:t>
+              <a:t>8/13/2025</a:t>
             </a:fld>
             <a:endParaRPr lang="en-US"/>
           </a:p>
@@ -6420,7 +6418,7 @@
             <a:fld id="{1D8BD707-D9CF-40AE-B4C6-C98DA3205C09}" type="datetimeFigureOut">
               <a:rPr lang="en-US" smtClean="0"/>
               <a:pPr/>
-              <a:t>5/8/2025</a:t>
+              <a:t>8/13/2025</a:t>
             </a:fld>
             <a:endParaRPr lang="en-US"/>
           </a:p>
@@ -7007,8 +7005,36 @@
           <a:lstStyle/>
           <a:p>
             <a:r>
-              <a:rPr lang="en-US" sz="1800" dirty="0">
-                <a:latin typeface="Segoe UI" panose="020B0502040204020203" pitchFamily="34" charset="0"/>
+              <a:rPr lang="en-US" sz="1800" dirty="0"/>
+              <a:t>Azure DevOps is </a:t>
+            </a:r>
+            <a:r>
+              <a:rPr lang="en-US" sz="1800" b="1" dirty="0"/>
+              <a:t>Microsoft’s cloud-based suite of tools</a:t>
+            </a:r>
+            <a:r>
+              <a:rPr lang="en-US" sz="1800" dirty="0"/>
+              <a:t> that helps teams </a:t>
+            </a:r>
+            <a:r>
+              <a:rPr lang="en-US" sz="1800" b="1" dirty="0"/>
+              <a:t>plan, develop, test, deliver, and </a:t>
+            </a:r>
+            <a:r>
+              <a:rPr lang="en-US" sz="1600" b="1" dirty="0"/>
+              <a:t>monitor software</a:t>
+            </a:r>
+            <a:r>
+              <a:rPr lang="en-US" sz="1600" dirty="0"/>
+              <a:t> in a collaborative and automated way.</a:t>
+            </a:r>
+            <a:endParaRPr lang="en-US" sz="1600" dirty="0">
+              <a:cs typeface="Segoe UI" panose="020B0502040204020203" pitchFamily="34" charset="0"/>
+            </a:endParaRPr>
+          </a:p>
+          <a:p>
+            <a:r>
+              <a:rPr lang="en-US" sz="1600" dirty="0">
                 <a:cs typeface="Segoe UI" panose="020B0502040204020203" pitchFamily="34" charset="0"/>
               </a:rPr>
               <a:t>Azure DevOps is a set of development tools and services provided by Microsoft to support the entire software development lifecycle.</a:t>
@@ -7016,17 +7042,24 @@
           </a:p>
           <a:p>
             <a:r>
-              <a:rPr lang="en-US" sz="1800" dirty="0">
-                <a:latin typeface="Segoe UI" panose="020B0502040204020203" pitchFamily="34" charset="0"/>
-                <a:cs typeface="Segoe UI" panose="020B0502040204020203" pitchFamily="34" charset="0"/>
-              </a:rPr>
-              <a:t> It enables teams to plan work, collaborate on code development, and build and deploy applications efficiently.</a:t>
-            </a:r>
-          </a:p>
-          <a:p>
-            <a:r>
-              <a:rPr lang="en-US" sz="1800" dirty="0">
-                <a:latin typeface="Segoe UI" panose="020B0502040204020203" pitchFamily="34" charset="0"/>
+              <a:rPr lang="en-US" sz="1600" dirty="0"/>
+              <a:t>Think of it as a </a:t>
+            </a:r>
+            <a:r>
+              <a:rPr lang="en-US" sz="1600" b="1" dirty="0"/>
+              <a:t>complete DevOps lifecycle platform</a:t>
+            </a:r>
+            <a:r>
+              <a:rPr lang="en-US" sz="1600" dirty="0"/>
+              <a:t> that integrates source control, CI/CD, agile project management, artifact storage, and test management.</a:t>
+            </a:r>
+            <a:endParaRPr lang="en-US" sz="1600" dirty="0">
+              <a:cs typeface="Segoe UI" panose="020B0502040204020203" pitchFamily="34" charset="0"/>
+            </a:endParaRPr>
+          </a:p>
+          <a:p>
+            <a:r>
+              <a:rPr lang="en-US" sz="1600" dirty="0">
                 <a:cs typeface="Segoe UI" panose="020B0502040204020203" pitchFamily="34" charset="0"/>
               </a:rPr>
               <a:t>Azure DevOps, a modern DevOps tool of planning, developing, testing and deploying modern apps.</a:t>
@@ -7034,12 +7067,43 @@
           </a:p>
           <a:p>
             <a:r>
-              <a:rPr lang="en-US" sz="1800" dirty="0">
-                <a:latin typeface="Segoe UI" panose="020B0502040204020203" pitchFamily="34" charset="0"/>
+              <a:rPr lang="en-US" sz="1600" dirty="0">
                 <a:cs typeface="Segoe UI" panose="020B0502040204020203" pitchFamily="34" charset="0"/>
               </a:rPr>
               <a:t>Azure DevOps services are independent of cloud or platform.</a:t>
             </a:r>
+          </a:p>
+          <a:p>
+            <a:r>
+              <a:rPr lang="en-US" sz="1600" dirty="0"/>
+              <a:t>It can be used:</a:t>
+            </a:r>
+          </a:p>
+          <a:p>
+            <a:r>
+              <a:rPr lang="en-US" sz="1600" b="1" dirty="0"/>
+              <a:t>On the cloud</a:t>
+            </a:r>
+            <a:r>
+              <a:rPr lang="en-US" sz="1600" dirty="0"/>
+              <a:t> → Azure DevOps Services</a:t>
+            </a:r>
+          </a:p>
+          <a:p>
+            <a:r>
+              <a:rPr lang="en-US" sz="1600" b="1" dirty="0"/>
+              <a:t>On-premises</a:t>
+            </a:r>
+            <a:r>
+              <a:rPr lang="en-US" sz="1600" dirty="0"/>
+              <a:t> → Azure DevOps Server (formerly Team Foundation Server - TFS)</a:t>
+            </a:r>
+          </a:p>
+          <a:p>
+            <a:endParaRPr lang="en-US" sz="1800" dirty="0">
+              <a:latin typeface="Segoe UI" panose="020B0502040204020203" pitchFamily="34" charset="0"/>
+              <a:cs typeface="Segoe UI" panose="020B0502040204020203" pitchFamily="34" charset="0"/>
+            </a:endParaRPr>
           </a:p>
           <a:p>
             <a:endParaRPr lang="en-US" sz="1800" dirty="0">
@@ -7078,8 +7142,8 @@
         </p:blipFill>
         <p:spPr bwMode="auto">
           <a:xfrm>
-            <a:off x="1703613" y="3578679"/>
-            <a:ext cx="7429501" cy="2637064"/>
+            <a:off x="6252464" y="5082268"/>
+            <a:ext cx="5176157" cy="2027463"/>
           </a:xfrm>
           <a:prstGeom prst="rect">
             <a:avLst/>
@@ -7111,318 +7175,6 @@
         <p:cNvPr id="1" name="">
           <a:extLst>
             <a:ext uri="{FF2B5EF4-FFF2-40B4-BE49-F238E27FC236}">
-              <a16:creationId xmlns:a16="http://schemas.microsoft.com/office/drawing/2014/main" id="{FD705075-583A-0D13-8510-DE97552EB3E9}"/>
-            </a:ext>
-          </a:extLst>
-        </p:cNvPr>
-        <p:cNvGrpSpPr/>
-        <p:nvPr/>
-      </p:nvGrpSpPr>
-      <p:grpSpPr>
-        <a:xfrm>
-          <a:off x="0" y="0"/>
-          <a:ext cx="0" cy="0"/>
-          <a:chOff x="0" y="0"/>
-          <a:chExt cx="0" cy="0"/>
-        </a:xfrm>
-      </p:grpSpPr>
-      <p:sp>
-        <p:nvSpPr>
-          <p:cNvPr id="4" name="Title 3">
-            <a:extLst>
-              <a:ext uri="{FF2B5EF4-FFF2-40B4-BE49-F238E27FC236}">
-                <a16:creationId xmlns:a16="http://schemas.microsoft.com/office/drawing/2014/main" id="{5040673A-2F8A-F842-EFD2-BC5D42D77241}"/>
-              </a:ext>
-            </a:extLst>
-          </p:cNvPr>
-          <p:cNvSpPr>
-            <a:spLocks noGrp="1"/>
-          </p:cNvSpPr>
-          <p:nvPr>
-            <p:ph type="title"/>
-          </p:nvPr>
-        </p:nvSpPr>
-        <p:spPr/>
-        <p:txBody>
-          <a:bodyPr>
-            <a:normAutofit/>
-          </a:bodyPr>
-          <a:lstStyle/>
-          <a:p>
-            <a:r>
-              <a:rPr lang="en-US" sz="2400" dirty="0"/>
-              <a:t>Key Services/Components in Azure DevOps</a:t>
-            </a:r>
-            <a:endParaRPr lang="en-IN" sz="2400" dirty="0"/>
-          </a:p>
-        </p:txBody>
-      </p:sp>
-      <p:sp>
-        <p:nvSpPr>
-          <p:cNvPr id="5" name="Content Placeholder 4">
-            <a:extLst>
-              <a:ext uri="{FF2B5EF4-FFF2-40B4-BE49-F238E27FC236}">
-                <a16:creationId xmlns:a16="http://schemas.microsoft.com/office/drawing/2014/main" id="{D6F922A6-B1EA-EC1A-901A-04D8C00A72F3}"/>
-              </a:ext>
-            </a:extLst>
-          </p:cNvPr>
-          <p:cNvSpPr>
-            <a:spLocks noGrp="1"/>
-          </p:cNvSpPr>
-          <p:nvPr>
-            <p:ph sz="quarter" idx="1"/>
-          </p:nvPr>
-        </p:nvSpPr>
-        <p:spPr/>
-        <p:txBody>
-          <a:bodyPr>
-            <a:normAutofit/>
-          </a:bodyPr>
-          <a:lstStyle/>
-          <a:p>
-            <a:r>
-              <a:rPr lang="en-US" sz="2000" b="1" dirty="0"/>
-              <a:t>2. Azure Repos</a:t>
-            </a:r>
-          </a:p>
-          <a:p>
-            <a:r>
-              <a:rPr lang="en-US" sz="1800" b="1" dirty="0"/>
-              <a:t>Purpose</a:t>
-            </a:r>
-            <a:r>
-              <a:rPr lang="en-US" sz="1800" dirty="0"/>
-              <a:t>: Source code management.</a:t>
-            </a:r>
-          </a:p>
-          <a:p>
-            <a:r>
-              <a:rPr lang="en-US" sz="1800" b="1" dirty="0"/>
-              <a:t>Features</a:t>
-            </a:r>
-            <a:r>
-              <a:rPr lang="en-US" sz="1800" dirty="0"/>
-              <a:t>:</a:t>
-            </a:r>
-          </a:p>
-          <a:p>
-            <a:r>
-              <a:rPr lang="en-US" sz="1800" dirty="0"/>
-              <a:t>Git repositories and Team Foundation Version Control (TFVC)</a:t>
-            </a:r>
-          </a:p>
-          <a:p>
-            <a:r>
-              <a:rPr lang="en-US" sz="1800" dirty="0"/>
-              <a:t>Pull requests and code reviews</a:t>
-            </a:r>
-          </a:p>
-          <a:p>
-            <a:r>
-              <a:rPr lang="en-US" sz="1800" dirty="0"/>
-              <a:t>Branching and merging strategies</a:t>
-            </a:r>
-          </a:p>
-          <a:p>
-            <a:r>
-              <a:rPr lang="en-US" sz="1800" dirty="0"/>
-              <a:t>Commit history and auditing</a:t>
-            </a:r>
-          </a:p>
-          <a:p>
-            <a:endParaRPr lang="en-IN" sz="1800" dirty="0">
-              <a:latin typeface="Segoe UI" panose="020B0502040204020203" pitchFamily="34" charset="0"/>
-              <a:cs typeface="Segoe UI" panose="020B0502040204020203" pitchFamily="34" charset="0"/>
-            </a:endParaRPr>
-          </a:p>
-          <a:p>
-            <a:endParaRPr lang="en-IN" sz="1800" dirty="0">
-              <a:latin typeface="Segoe UI" panose="020B0502040204020203" pitchFamily="34" charset="0"/>
-              <a:cs typeface="Segoe UI" panose="020B0502040204020203" pitchFamily="34" charset="0"/>
-            </a:endParaRPr>
-          </a:p>
-        </p:txBody>
-      </p:sp>
-    </p:spTree>
-    <p:extLst>
-      <p:ext uri="{BB962C8B-B14F-4D97-AF65-F5344CB8AC3E}">
-        <p14:creationId xmlns:p14="http://schemas.microsoft.com/office/powerpoint/2010/main" val="2281372155"/>
-      </p:ext>
-    </p:extLst>
-  </p:cSld>
-  <p:clrMapOvr>
-    <a:masterClrMapping/>
-  </p:clrMapOvr>
-</p:sld>
-</file>
-
-<file path=ppt/slides/slide11.xml><?xml version="1.0" encoding="utf-8"?>
-<p:sld xmlns:a="http://schemas.openxmlformats.org/drawingml/2006/main" xmlns:r="http://schemas.openxmlformats.org/officeDocument/2006/relationships" xmlns:p="http://schemas.openxmlformats.org/presentationml/2006/main">
-  <p:cSld>
-    <p:spTree>
-      <p:nvGrpSpPr>
-        <p:cNvPr id="1" name="">
-          <a:extLst>
-            <a:ext uri="{FF2B5EF4-FFF2-40B4-BE49-F238E27FC236}">
-              <a16:creationId xmlns:a16="http://schemas.microsoft.com/office/drawing/2014/main" id="{ACB718E6-6082-4DB8-5242-E999112A2292}"/>
-            </a:ext>
-          </a:extLst>
-        </p:cNvPr>
-        <p:cNvGrpSpPr/>
-        <p:nvPr/>
-      </p:nvGrpSpPr>
-      <p:grpSpPr>
-        <a:xfrm>
-          <a:off x="0" y="0"/>
-          <a:ext cx="0" cy="0"/>
-          <a:chOff x="0" y="0"/>
-          <a:chExt cx="0" cy="0"/>
-        </a:xfrm>
-      </p:grpSpPr>
-      <p:sp>
-        <p:nvSpPr>
-          <p:cNvPr id="4" name="Title 3">
-            <a:extLst>
-              <a:ext uri="{FF2B5EF4-FFF2-40B4-BE49-F238E27FC236}">
-                <a16:creationId xmlns:a16="http://schemas.microsoft.com/office/drawing/2014/main" id="{3E20B40D-9CCC-97D6-5D6B-1B53217AE34E}"/>
-              </a:ext>
-            </a:extLst>
-          </p:cNvPr>
-          <p:cNvSpPr>
-            <a:spLocks noGrp="1"/>
-          </p:cNvSpPr>
-          <p:nvPr>
-            <p:ph type="title"/>
-          </p:nvPr>
-        </p:nvSpPr>
-        <p:spPr/>
-        <p:txBody>
-          <a:bodyPr>
-            <a:normAutofit/>
-          </a:bodyPr>
-          <a:lstStyle/>
-          <a:p>
-            <a:r>
-              <a:rPr lang="en-US" sz="2400" dirty="0"/>
-              <a:t>Key Services/Components in Azure DevOps</a:t>
-            </a:r>
-            <a:endParaRPr lang="en-IN" sz="2400" dirty="0"/>
-          </a:p>
-        </p:txBody>
-      </p:sp>
-      <p:sp>
-        <p:nvSpPr>
-          <p:cNvPr id="5" name="Content Placeholder 4">
-            <a:extLst>
-              <a:ext uri="{FF2B5EF4-FFF2-40B4-BE49-F238E27FC236}">
-                <a16:creationId xmlns:a16="http://schemas.microsoft.com/office/drawing/2014/main" id="{FFBAA333-3F58-B9B1-6714-5634BC3CF4EB}"/>
-              </a:ext>
-            </a:extLst>
-          </p:cNvPr>
-          <p:cNvSpPr>
-            <a:spLocks noGrp="1"/>
-          </p:cNvSpPr>
-          <p:nvPr>
-            <p:ph sz="quarter" idx="1"/>
-          </p:nvPr>
-        </p:nvSpPr>
-        <p:spPr/>
-        <p:txBody>
-          <a:bodyPr>
-            <a:normAutofit/>
-          </a:bodyPr>
-          <a:lstStyle/>
-          <a:p>
-            <a:r>
-              <a:rPr lang="en-US" sz="2000" b="1" dirty="0"/>
-              <a:t>3. Azure Pipelines</a:t>
-            </a:r>
-          </a:p>
-          <a:p>
-            <a:r>
-              <a:rPr lang="en-US" sz="1800" b="1" dirty="0"/>
-              <a:t>Purpose</a:t>
-            </a:r>
-            <a:r>
-              <a:rPr lang="en-US" sz="1800" dirty="0"/>
-              <a:t>:  Continuous Integration (CI) and Continuous Delivery (CD).</a:t>
-            </a:r>
-          </a:p>
-          <a:p>
-            <a:r>
-              <a:rPr lang="en-US" sz="1800" b="1" dirty="0"/>
-              <a:t>Features</a:t>
-            </a:r>
-            <a:r>
-              <a:rPr lang="en-US" sz="1800" dirty="0"/>
-              <a:t>:</a:t>
-            </a:r>
-          </a:p>
-          <a:p>
-            <a:r>
-              <a:rPr lang="en-US" sz="1800" dirty="0"/>
-              <a:t>Build automation and deployment workflows</a:t>
-            </a:r>
-          </a:p>
-          <a:p>
-            <a:r>
-              <a:rPr lang="en-US" sz="1800" dirty="0"/>
-              <a:t>Multi-platform support (Windows, Linux, macOS)</a:t>
-            </a:r>
-          </a:p>
-          <a:p>
-            <a:r>
-              <a:rPr lang="en-US" sz="1800" dirty="0"/>
-              <a:t>Container and Kubernetes support</a:t>
-            </a:r>
-          </a:p>
-          <a:p>
-            <a:r>
-              <a:rPr lang="en-US" sz="1800" dirty="0"/>
-              <a:t>YAML or classic editor pipelines</a:t>
-            </a:r>
-          </a:p>
-          <a:p>
-            <a:r>
-              <a:rPr lang="en-US" sz="1800" dirty="0"/>
-              <a:t>Integration with GitHub, Bitbucket, etc.</a:t>
-            </a:r>
-          </a:p>
-          <a:p>
-            <a:endParaRPr lang="en-IN" sz="1800" dirty="0">
-              <a:latin typeface="Segoe UI" panose="020B0502040204020203" pitchFamily="34" charset="0"/>
-              <a:cs typeface="Segoe UI" panose="020B0502040204020203" pitchFamily="34" charset="0"/>
-            </a:endParaRPr>
-          </a:p>
-          <a:p>
-            <a:endParaRPr lang="en-IN" sz="1800" dirty="0">
-              <a:latin typeface="Segoe UI" panose="020B0502040204020203" pitchFamily="34" charset="0"/>
-              <a:cs typeface="Segoe UI" panose="020B0502040204020203" pitchFamily="34" charset="0"/>
-            </a:endParaRPr>
-          </a:p>
-        </p:txBody>
-      </p:sp>
-    </p:spTree>
-    <p:extLst>
-      <p:ext uri="{BB962C8B-B14F-4D97-AF65-F5344CB8AC3E}">
-        <p14:creationId xmlns:p14="http://schemas.microsoft.com/office/powerpoint/2010/main" val="2365816433"/>
-      </p:ext>
-    </p:extLst>
-  </p:cSld>
-  <p:clrMapOvr>
-    <a:masterClrMapping/>
-  </p:clrMapOvr>
-</p:sld>
-</file>
-
-<file path=ppt/slides/slide12.xml><?xml version="1.0" encoding="utf-8"?>
-<p:sld xmlns:a="http://schemas.openxmlformats.org/drawingml/2006/main" xmlns:r="http://schemas.openxmlformats.org/officeDocument/2006/relationships" xmlns:p="http://schemas.openxmlformats.org/presentationml/2006/main">
-  <p:cSld>
-    <p:spTree>
-      <p:nvGrpSpPr>
-        <p:cNvPr id="1" name="">
-          <a:extLst>
-            <a:ext uri="{FF2B5EF4-FFF2-40B4-BE49-F238E27FC236}">
               <a16:creationId xmlns:a16="http://schemas.microsoft.com/office/drawing/2014/main" id="{6335BC6B-BAC4-B0F4-42FA-449DEF316E9F}"/>
             </a:ext>
           </a:extLst>
@@ -7574,7 +7326,7 @@
 </p:sld>
 </file>
 
-<file path=ppt/slides/slide13.xml><?xml version="1.0" encoding="utf-8"?>
+<file path=ppt/slides/slide11.xml><?xml version="1.0" encoding="utf-8"?>
 <p:sld xmlns:a="http://schemas.openxmlformats.org/drawingml/2006/main" xmlns:r="http://schemas.openxmlformats.org/officeDocument/2006/relationships" xmlns:p="http://schemas.openxmlformats.org/presentationml/2006/main">
   <p:cSld>
     <p:spTree>
@@ -7653,7 +7405,7 @@
           <a:p>
             <a:r>
               <a:rPr lang="en-US" sz="2000" b="1" dirty="0"/>
-              <a:t>4.Azure Artifacts</a:t>
+              <a:t>5.Azure Artifacts</a:t>
             </a:r>
           </a:p>
           <a:p>
@@ -7761,7 +7513,7 @@
 </p:sld>
 </file>
 
-<file path=ppt/slides/slide14.xml><?xml version="1.0" encoding="utf-8"?>
+<file path=ppt/slides/slide12.xml><?xml version="1.0" encoding="utf-8"?>
 <p:sld xmlns:a="http://schemas.openxmlformats.org/drawingml/2006/main" xmlns:r="http://schemas.openxmlformats.org/officeDocument/2006/relationships" xmlns:p="http://schemas.openxmlformats.org/presentationml/2006/main">
   <p:cSld>
     <p:spTree>
@@ -7882,7 +7634,13 @@
   <p:cSld>
     <p:spTree>
       <p:nvGrpSpPr>
-        <p:cNvPr id="1" name=""/>
+        <p:cNvPr id="1" name="">
+          <a:extLst>
+            <a:ext uri="{FF2B5EF4-FFF2-40B4-BE49-F238E27FC236}">
+              <a16:creationId xmlns:a16="http://schemas.microsoft.com/office/drawing/2014/main" id="{D7131B5C-8AA5-647F-035F-6C59E17855ED}"/>
+            </a:ext>
+          </a:extLst>
+        </p:cNvPr>
         <p:cNvGrpSpPr/>
         <p:nvPr/>
       </p:nvGrpSpPr>
@@ -7896,7 +7654,13 @@
       </p:grpSpPr>
       <p:sp>
         <p:nvSpPr>
-          <p:cNvPr id="4" name="Title 3"/>
+          <p:cNvPr id="4" name="Title 3">
+            <a:extLst>
+              <a:ext uri="{FF2B5EF4-FFF2-40B4-BE49-F238E27FC236}">
+                <a16:creationId xmlns:a16="http://schemas.microsoft.com/office/drawing/2014/main" id="{71C52590-310C-DC5E-5E9C-A5DD20722A0A}"/>
+              </a:ext>
+            </a:extLst>
+          </p:cNvPr>
           <p:cNvSpPr>
             <a:spLocks noGrp="1"/>
           </p:cNvSpPr>
@@ -7912,8 +7676,8 @@
           <a:lstStyle/>
           <a:p>
             <a:r>
-              <a:rPr lang="fr-FR" sz="2400" dirty="0"/>
-              <a:t>Azure DevOps Services Vs. Server</a:t>
+              <a:rPr lang="en-US" sz="2400" dirty="0"/>
+              <a:t>Why Choose Azure DevOps?</a:t>
             </a:r>
             <a:endParaRPr lang="en-IN" sz="2400" dirty="0"/>
           </a:p>
@@ -7921,331 +7685,192 @@
       </p:sp>
       <p:sp>
         <p:nvSpPr>
-          <p:cNvPr id="5" name="Content Placeholder 4"/>
-          <p:cNvSpPr>
-            <a:spLocks noGrp="1"/>
-          </p:cNvSpPr>
-          <p:nvPr>
-            <p:ph sz="quarter" idx="1"/>
-          </p:nvPr>
-        </p:nvSpPr>
-        <p:spPr/>
-        <p:txBody>
-          <a:bodyPr>
-            <a:normAutofit/>
-          </a:bodyPr>
-          <a:lstStyle/>
-          <a:p>
-            <a:r>
-              <a:rPr lang="en-US" sz="1800" b="1" dirty="0">
-                <a:latin typeface="Segoe UI" panose="020B0502040204020203" pitchFamily="34" charset="0"/>
-                <a:cs typeface="Segoe UI" panose="020B0502040204020203" pitchFamily="34" charset="0"/>
-              </a:rPr>
-              <a:t>Azure DevOps comes with two options:</a:t>
-            </a:r>
-          </a:p>
-          <a:p>
-            <a:r>
-              <a:rPr lang="en-US" sz="1800" dirty="0">
-                <a:latin typeface="Segoe UI" panose="020B0502040204020203" pitchFamily="34" charset="0"/>
-                <a:cs typeface="Segoe UI" panose="020B0502040204020203" pitchFamily="34" charset="0"/>
-              </a:rPr>
-              <a:t>Azure DevOps Services</a:t>
-            </a:r>
-          </a:p>
-          <a:p>
-            <a:r>
-              <a:rPr lang="en-US" sz="1800" dirty="0">
-                <a:latin typeface="Segoe UI" panose="020B0502040204020203" pitchFamily="34" charset="0"/>
-                <a:cs typeface="Segoe UI" panose="020B0502040204020203" pitchFamily="34" charset="0"/>
-              </a:rPr>
-              <a:t>Azure DevOps Server</a:t>
-            </a:r>
-          </a:p>
-          <a:p>
-            <a:r>
-              <a:rPr lang="en-US" sz="1800" dirty="0">
-                <a:latin typeface="Segoe UI" panose="020B0502040204020203" pitchFamily="34" charset="0"/>
-                <a:cs typeface="Segoe UI" panose="020B0502040204020203" pitchFamily="34" charset="0"/>
-              </a:rPr>
-              <a:t>Both the services and the server were known as Visual Studio Team Services (VSTS) and Team Foundation Server (TFS), respectively. They provide environments that support Git, Agile tools, and continuous integration. Let us see the differences between them:</a:t>
-            </a:r>
-          </a:p>
-          <a:p>
-            <a:endParaRPr lang="en-IN" sz="1800" dirty="0">
-              <a:latin typeface="Segoe UI" panose="020B0502040204020203" pitchFamily="34" charset="0"/>
-              <a:cs typeface="Segoe UI" panose="020B0502040204020203" pitchFamily="34" charset="0"/>
-            </a:endParaRPr>
-          </a:p>
-        </p:txBody>
-      </p:sp>
-      <p:graphicFrame>
-        <p:nvGraphicFramePr>
-          <p:cNvPr id="3" name="Table 5">
+          <p:cNvPr id="5" name="Content Placeholder 4">
             <a:extLst>
               <a:ext uri="{FF2B5EF4-FFF2-40B4-BE49-F238E27FC236}">
-                <a16:creationId xmlns:a16="http://schemas.microsoft.com/office/drawing/2014/main" id="{F9ABD3EE-89B2-64E3-D841-AB87B3B16FAA}"/>
+                <a16:creationId xmlns:a16="http://schemas.microsoft.com/office/drawing/2014/main" id="{7FE04D8C-D5FF-9448-AC37-93E18DAB2377}"/>
               </a:ext>
             </a:extLst>
           </p:cNvPr>
-          <p:cNvGraphicFramePr>
-            <a:graphicFrameLocks noGrp="1"/>
-          </p:cNvGraphicFramePr>
-          <p:nvPr>
-            <p:extLst>
-              <p:ext uri="{D42A27DB-BD31-4B8C-83A1-F6EECF244321}">
-                <p14:modId xmlns:p14="http://schemas.microsoft.com/office/powerpoint/2010/main" val="856791840"/>
-              </p:ext>
-            </p:extLst>
-          </p:nvPr>
-        </p:nvGraphicFramePr>
-        <p:xfrm>
-          <a:off x="816864" y="4127247"/>
-          <a:ext cx="9720508" cy="2703649"/>
-        </p:xfrm>
-        <a:graphic>
-          <a:graphicData uri="http://schemas.openxmlformats.org/drawingml/2006/table">
-            <a:tbl>
-              <a:tblPr firstRow="1" bandRow="1">
-                <a:tableStyleId>{5C22544A-7EE6-4342-B048-85BDC9FD1C3A}</a:tableStyleId>
-              </a:tblPr>
-              <a:tblGrid>
-                <a:gridCol w="4860254">
-                  <a:extLst>
-                    <a:ext uri="{9D8B030D-6E8A-4147-A177-3AD203B41FA5}">
-                      <a16:colId xmlns:a16="http://schemas.microsoft.com/office/drawing/2014/main" val="2698439501"/>
-                    </a:ext>
-                  </a:extLst>
-                </a:gridCol>
-                <a:gridCol w="4860254">
-                  <a:extLst>
-                    <a:ext uri="{9D8B030D-6E8A-4147-A177-3AD203B41FA5}">
-                      <a16:colId xmlns:a16="http://schemas.microsoft.com/office/drawing/2014/main" val="2025106605"/>
-                    </a:ext>
-                  </a:extLst>
-                </a:gridCol>
-              </a:tblGrid>
-              <a:tr h="302930">
-                <a:tc>
-                  <a:txBody>
-                    <a:bodyPr/>
-                    <a:lstStyle/>
-                    <a:p>
-                      <a:pPr fontAlgn="t"/>
-                      <a:r>
-                        <a:rPr lang="en-US" b="1" dirty="0">
-                          <a:effectLst/>
-                          <a:latin typeface="Open Sans" panose="020B0606030504020204" pitchFamily="34" charset="0"/>
-                        </a:rPr>
-                        <a:t>Azure DevOps Services</a:t>
-                      </a:r>
-                      <a:endParaRPr lang="en-US" dirty="0">
-                        <a:effectLst/>
-                        <a:latin typeface="Open Sans" panose="020B0606030504020204" pitchFamily="34" charset="0"/>
-                      </a:endParaRPr>
-                    </a:p>
-                  </a:txBody>
-                  <a:tcPr/>
-                </a:tc>
-                <a:tc>
-                  <a:txBody>
-                    <a:bodyPr/>
-                    <a:lstStyle/>
-                    <a:p>
-                      <a:pPr fontAlgn="t"/>
-                      <a:r>
-                        <a:rPr lang="en-US" b="1" dirty="0">
-                          <a:effectLst/>
-                          <a:latin typeface="Open Sans" panose="020B0606030504020204" pitchFamily="34" charset="0"/>
-                        </a:rPr>
-                        <a:t>Azure DevOps Server</a:t>
-                      </a:r>
-                      <a:endParaRPr lang="en-US" dirty="0">
-                        <a:effectLst/>
-                        <a:latin typeface="Open Sans" panose="020B0606030504020204" pitchFamily="34" charset="0"/>
-                      </a:endParaRPr>
-                    </a:p>
-                  </a:txBody>
-                  <a:tcPr/>
-                </a:tc>
-                <a:extLst>
-                  <a:ext uri="{0D108BD9-81ED-4DB2-BD59-A6C34878D82A}">
-                    <a16:rowId xmlns:a16="http://schemas.microsoft.com/office/drawing/2014/main" val="484885962"/>
-                  </a:ext>
-                </a:extLst>
-              </a:tr>
-              <a:tr h="241972">
-                <a:tc>
-                  <a:txBody>
-                    <a:bodyPr/>
-                    <a:lstStyle/>
-                    <a:p>
-                      <a:pPr fontAlgn="t"/>
-                      <a:r>
-                        <a:rPr lang="en-US">
-                          <a:effectLst/>
-                          <a:latin typeface="Open Sans" panose="020B0606030504020204" pitchFamily="34" charset="0"/>
-                        </a:rPr>
-                        <a:t>It is a cloud offering.</a:t>
-                      </a:r>
-                    </a:p>
-                  </a:txBody>
-                  <a:tcPr/>
-                </a:tc>
-                <a:tc>
-                  <a:txBody>
-                    <a:bodyPr/>
-                    <a:lstStyle/>
-                    <a:p>
-                      <a:pPr fontAlgn="t"/>
-                      <a:r>
-                        <a:rPr lang="en-US" dirty="0">
-                          <a:effectLst/>
-                          <a:latin typeface="Open Sans" panose="020B0606030504020204" pitchFamily="34" charset="0"/>
-                        </a:rPr>
-                        <a:t>It is an on-premise offering.</a:t>
-                      </a:r>
-                    </a:p>
-                  </a:txBody>
-                  <a:tcPr/>
-                </a:tc>
-                <a:extLst>
-                  <a:ext uri="{0D108BD9-81ED-4DB2-BD59-A6C34878D82A}">
-                    <a16:rowId xmlns:a16="http://schemas.microsoft.com/office/drawing/2014/main" val="2427989291"/>
-                  </a:ext>
-                </a:extLst>
-              </a:tr>
-              <a:tr h="596642">
-                <a:tc>
-                  <a:txBody>
-                    <a:bodyPr/>
-                    <a:lstStyle/>
-                    <a:p>
-                      <a:pPr fontAlgn="t"/>
-                      <a:r>
-                        <a:rPr lang="en-US" dirty="0">
-                          <a:effectLst/>
-                          <a:latin typeface="Open Sans" panose="020B0606030504020204" pitchFamily="34" charset="0"/>
-                        </a:rPr>
-                        <a:t>It offers two options for scaling and scoping data: organizations and projects.</a:t>
-                      </a:r>
-                    </a:p>
-                  </a:txBody>
-                  <a:tcPr/>
-                </a:tc>
-                <a:tc>
-                  <a:txBody>
-                    <a:bodyPr/>
-                    <a:lstStyle/>
-                    <a:p>
-                      <a:pPr fontAlgn="t"/>
-                      <a:r>
-                        <a:rPr lang="en-US" dirty="0">
-                          <a:effectLst/>
-                          <a:latin typeface="Open Sans" panose="020B0606030504020204" pitchFamily="34" charset="0"/>
-                        </a:rPr>
-                        <a:t>It offers three options for scaling and scoping data: deployment, project collections, and projects.</a:t>
-                      </a:r>
-                    </a:p>
-                  </a:txBody>
-                  <a:tcPr/>
-                </a:tc>
-                <a:extLst>
-                  <a:ext uri="{0D108BD9-81ED-4DB2-BD59-A6C34878D82A}">
-                    <a16:rowId xmlns:a16="http://schemas.microsoft.com/office/drawing/2014/main" val="4153764921"/>
-                  </a:ext>
-                </a:extLst>
-              </a:tr>
-              <a:tr h="417649">
-                <a:tc>
-                  <a:txBody>
-                    <a:bodyPr/>
-                    <a:lstStyle/>
-                    <a:p>
-                      <a:pPr fontAlgn="t"/>
-                      <a:r>
-                        <a:rPr lang="en-US" dirty="0">
-                          <a:effectLst/>
-                          <a:latin typeface="Open Sans" panose="020B0606030504020204" pitchFamily="34" charset="0"/>
-                        </a:rPr>
-                        <a:t>You can connect over the public network.</a:t>
-                      </a:r>
-                    </a:p>
-                  </a:txBody>
-                  <a:tcPr/>
-                </a:tc>
-                <a:tc>
-                  <a:txBody>
-                    <a:bodyPr/>
-                    <a:lstStyle/>
-                    <a:p>
-                      <a:pPr fontAlgn="t"/>
-                      <a:r>
-                        <a:rPr lang="en-US">
-                          <a:effectLst/>
-                          <a:latin typeface="Open Sans" panose="020B0606030504020204" pitchFamily="34" charset="0"/>
-                        </a:rPr>
-                        <a:t>You can connect to the intranet server.</a:t>
-                      </a:r>
-                    </a:p>
-                  </a:txBody>
-                  <a:tcPr/>
-                </a:tc>
-                <a:extLst>
-                  <a:ext uri="{0D108BD9-81ED-4DB2-BD59-A6C34878D82A}">
-                    <a16:rowId xmlns:a16="http://schemas.microsoft.com/office/drawing/2014/main" val="3866759012"/>
-                  </a:ext>
-                </a:extLst>
-              </a:tr>
-              <a:tr h="417649">
-                <a:tc>
-                  <a:txBody>
-                    <a:bodyPr/>
-                    <a:lstStyle/>
-                    <a:p>
-                      <a:pPr fontAlgn="t"/>
-                      <a:r>
-                        <a:rPr lang="en-US" dirty="0">
-                          <a:effectLst/>
-                          <a:latin typeface="Open Sans" panose="020B0606030504020204" pitchFamily="34" charset="0"/>
-                        </a:rPr>
-                        <a:t>The access level must be assigned to each user.</a:t>
-                      </a:r>
-                    </a:p>
-                  </a:txBody>
-                  <a:tcPr/>
-                </a:tc>
-                <a:tc>
-                  <a:txBody>
-                    <a:bodyPr/>
-                    <a:lstStyle/>
-                    <a:p>
-                      <a:pPr fontAlgn="t"/>
-                      <a:r>
-                        <a:rPr lang="en-US" dirty="0">
-                          <a:effectLst/>
-                          <a:latin typeface="Open Sans" panose="020B0606030504020204" pitchFamily="34" charset="0"/>
-                        </a:rPr>
-                        <a:t>Access levels must be set based on the license.</a:t>
-                      </a:r>
-                    </a:p>
-                  </a:txBody>
-                  <a:tcPr/>
-                </a:tc>
-                <a:extLst>
-                  <a:ext uri="{0D108BD9-81ED-4DB2-BD59-A6C34878D82A}">
-                    <a16:rowId xmlns:a16="http://schemas.microsoft.com/office/drawing/2014/main" val="3393012787"/>
-                  </a:ext>
-                </a:extLst>
-              </a:tr>
-            </a:tbl>
-          </a:graphicData>
-        </a:graphic>
-      </p:graphicFrame>
+          <p:cNvSpPr>
+            <a:spLocks noGrp="1"/>
+          </p:cNvSpPr>
+          <p:nvPr>
+            <p:ph sz="quarter" idx="1"/>
+          </p:nvPr>
+        </p:nvSpPr>
+        <p:spPr/>
+        <p:txBody>
+          <a:bodyPr>
+            <a:normAutofit fontScale="92500" lnSpcReduction="10000"/>
+          </a:bodyPr>
+          <a:lstStyle/>
+          <a:p>
+            <a:r>
+              <a:rPr lang="en-US" sz="1800" dirty="0">
+                <a:cs typeface="Segoe UI" panose="020B0502040204020203" pitchFamily="34" charset="0"/>
+              </a:rPr>
+              <a:t>Azure DevOps stands out as a comprehensive and flexible platform for modern software development teams.</a:t>
+            </a:r>
+          </a:p>
+          <a:p>
+            <a:r>
+              <a:rPr lang="en-US" sz="1800" dirty="0"/>
+              <a:t>Here are the key reasons why organizations choose Azure DevOps:</a:t>
+            </a:r>
+          </a:p>
+          <a:p>
+            <a:r>
+              <a:rPr lang="en-US" sz="1400" dirty="0"/>
+              <a:t>🌐 </a:t>
+            </a:r>
+            <a:r>
+              <a:rPr lang="en-US" sz="1400" b="1" dirty="0"/>
+              <a:t>1. </a:t>
+            </a:r>
+            <a:r>
+              <a:rPr lang="en-US" sz="2000" b="1" dirty="0"/>
+              <a:t>All-in-One DevOps Platform</a:t>
+            </a:r>
+            <a:endParaRPr lang="en-US" sz="2000" b="1" dirty="0">
+              <a:cs typeface="Segoe UI" panose="020B0502040204020203" pitchFamily="34" charset="0"/>
+            </a:endParaRPr>
+          </a:p>
+          <a:p>
+            <a:pPr lvl="1"/>
+            <a:r>
+              <a:rPr lang="en-US" sz="1800" dirty="0"/>
+              <a:t>Azure DevOps offers a </a:t>
+            </a:r>
+            <a:r>
+              <a:rPr lang="en-US" sz="1800" b="1" dirty="0"/>
+              <a:t>complete toolchain</a:t>
+            </a:r>
+            <a:r>
+              <a:rPr lang="en-US" sz="1800" dirty="0"/>
+              <a:t> for software development and delivery:</a:t>
+            </a:r>
+          </a:p>
+          <a:p>
+            <a:pPr lvl="2"/>
+            <a:r>
+              <a:rPr lang="en-US" sz="1800" dirty="0"/>
+              <a:t>Planning (Azure Boards)</a:t>
+            </a:r>
+          </a:p>
+          <a:p>
+            <a:pPr lvl="2"/>
+            <a:r>
+              <a:rPr lang="en-US" sz="1800" dirty="0"/>
+              <a:t>Development (Azure Repos)</a:t>
+            </a:r>
+          </a:p>
+          <a:p>
+            <a:pPr lvl="2"/>
+            <a:r>
+              <a:rPr lang="en-US" sz="1800" dirty="0"/>
+              <a:t>Testing (Azure Test Plans)</a:t>
+            </a:r>
+          </a:p>
+          <a:p>
+            <a:pPr lvl="2"/>
+            <a:r>
+              <a:rPr lang="en-US" sz="1800" dirty="0"/>
+              <a:t>Delivery (Azure Pipelines)</a:t>
+            </a:r>
+          </a:p>
+          <a:p>
+            <a:pPr lvl="2"/>
+            <a:r>
+              <a:rPr lang="en-US" sz="1800" dirty="0"/>
+              <a:t>Package Management (Azure Artifacts)</a:t>
+            </a:r>
+          </a:p>
+          <a:p>
+            <a:pPr lvl="1"/>
+            <a:r>
+              <a:rPr lang="en-US" sz="1800" dirty="0"/>
+              <a:t>This reduces the need to integrate and manage multiple third-party tools.</a:t>
+            </a:r>
+          </a:p>
+          <a:p>
+            <a:r>
+              <a:rPr lang="en-US" sz="2000" dirty="0"/>
+              <a:t>🔁 </a:t>
+            </a:r>
+            <a:r>
+              <a:rPr lang="en-US" sz="2000" b="1" dirty="0"/>
+              <a:t>2. Supports Any Language, Platform, or Cloud</a:t>
+            </a:r>
+          </a:p>
+          <a:p>
+            <a:pPr lvl="1"/>
+            <a:r>
+              <a:rPr lang="en-US" sz="1800" dirty="0"/>
+              <a:t>Works with </a:t>
+            </a:r>
+            <a:r>
+              <a:rPr lang="en-US" sz="1800" b="1" dirty="0"/>
+              <a:t>.NET, Java, Node.js, Python</a:t>
+            </a:r>
+            <a:r>
+              <a:rPr lang="en-US" sz="1800" dirty="0"/>
+              <a:t>, and more.</a:t>
+            </a:r>
+            <a:endParaRPr lang="en-US" sz="1800" b="1" dirty="0"/>
+          </a:p>
+          <a:p>
+            <a:pPr lvl="1"/>
+            <a:r>
+              <a:rPr lang="en-US" sz="1800" dirty="0"/>
+              <a:t>Supports building and deploying to </a:t>
+            </a:r>
+            <a:r>
+              <a:rPr lang="en-US" sz="1800" b="1" dirty="0"/>
+              <a:t>Windows, Linux, or macOS</a:t>
+            </a:r>
+            <a:r>
+              <a:rPr lang="en-US" sz="1800" dirty="0"/>
+              <a:t>.</a:t>
+            </a:r>
+            <a:endParaRPr lang="en-US" sz="1800" b="1" dirty="0"/>
+          </a:p>
+          <a:p>
+            <a:pPr lvl="1"/>
+            <a:r>
+              <a:rPr lang="en-US" sz="1800" dirty="0"/>
+              <a:t>Compatible with </a:t>
+            </a:r>
+            <a:r>
+              <a:rPr lang="en-US" sz="1800" b="1" dirty="0"/>
+              <a:t>Azure, AWS, GCP</a:t>
+            </a:r>
+            <a:r>
+              <a:rPr lang="en-US" sz="1800" dirty="0"/>
+              <a:t>, or on-premises environments.</a:t>
+            </a:r>
+          </a:p>
+          <a:p>
+            <a:endParaRPr lang="en-US" sz="1400" dirty="0">
+              <a:cs typeface="Segoe UI" panose="020B0502040204020203" pitchFamily="34" charset="0"/>
+            </a:endParaRPr>
+          </a:p>
+          <a:p>
+            <a:endParaRPr lang="en-IN" sz="1400" dirty="0">
+              <a:cs typeface="Segoe UI" panose="020B0502040204020203" pitchFamily="34" charset="0"/>
+            </a:endParaRPr>
+          </a:p>
+          <a:p>
+            <a:endParaRPr lang="en-IN" sz="1400" dirty="0">
+              <a:cs typeface="Segoe UI" panose="020B0502040204020203" pitchFamily="34" charset="0"/>
+            </a:endParaRPr>
+          </a:p>
+        </p:txBody>
+      </p:sp>
     </p:spTree>
     <p:extLst>
       <p:ext uri="{BB962C8B-B14F-4D97-AF65-F5344CB8AC3E}">
-        <p14:creationId xmlns:p14="http://schemas.microsoft.com/office/powerpoint/2010/main" val="2100069870"/>
+        <p14:creationId xmlns:p14="http://schemas.microsoft.com/office/powerpoint/2010/main" val="4154519688"/>
       </p:ext>
     </p:extLst>
   </p:cSld>
@@ -8256,6 +7881,286 @@
 </file>
 
 <file path=ppt/slides/slide3.xml><?xml version="1.0" encoding="utf-8"?>
+<p:sld xmlns:a="http://schemas.openxmlformats.org/drawingml/2006/main" xmlns:r="http://schemas.openxmlformats.org/officeDocument/2006/relationships" xmlns:p="http://schemas.openxmlformats.org/presentationml/2006/main">
+  <p:cSld>
+    <p:spTree>
+      <p:nvGrpSpPr>
+        <p:cNvPr id="1" name="">
+          <a:extLst>
+            <a:ext uri="{FF2B5EF4-FFF2-40B4-BE49-F238E27FC236}">
+              <a16:creationId xmlns:a16="http://schemas.microsoft.com/office/drawing/2014/main" id="{8807985E-FE68-5269-9BA0-F75B4938D8D3}"/>
+            </a:ext>
+          </a:extLst>
+        </p:cNvPr>
+        <p:cNvGrpSpPr/>
+        <p:nvPr/>
+      </p:nvGrpSpPr>
+      <p:grpSpPr>
+        <a:xfrm>
+          <a:off x="0" y="0"/>
+          <a:ext cx="0" cy="0"/>
+          <a:chOff x="0" y="0"/>
+          <a:chExt cx="0" cy="0"/>
+        </a:xfrm>
+      </p:grpSpPr>
+      <p:sp>
+        <p:nvSpPr>
+          <p:cNvPr id="4" name="Title 3">
+            <a:extLst>
+              <a:ext uri="{FF2B5EF4-FFF2-40B4-BE49-F238E27FC236}">
+                <a16:creationId xmlns:a16="http://schemas.microsoft.com/office/drawing/2014/main" id="{48F52263-FF32-05D7-5454-5BEBAAE637E9}"/>
+              </a:ext>
+            </a:extLst>
+          </p:cNvPr>
+          <p:cNvSpPr>
+            <a:spLocks noGrp="1"/>
+          </p:cNvSpPr>
+          <p:nvPr>
+            <p:ph type="title"/>
+          </p:nvPr>
+        </p:nvSpPr>
+        <p:spPr/>
+        <p:txBody>
+          <a:bodyPr>
+            <a:normAutofit/>
+          </a:bodyPr>
+          <a:lstStyle/>
+          <a:p>
+            <a:r>
+              <a:rPr lang="en-US" sz="2400" dirty="0"/>
+              <a:t>Why Choose Azure DevOps?</a:t>
+            </a:r>
+            <a:endParaRPr lang="en-IN" sz="2400" dirty="0"/>
+          </a:p>
+        </p:txBody>
+      </p:sp>
+      <p:sp>
+        <p:nvSpPr>
+          <p:cNvPr id="5" name="Content Placeholder 4">
+            <a:extLst>
+              <a:ext uri="{FF2B5EF4-FFF2-40B4-BE49-F238E27FC236}">
+                <a16:creationId xmlns:a16="http://schemas.microsoft.com/office/drawing/2014/main" id="{2A3DB246-39D0-0D39-7C0D-CF5C53C10AB6}"/>
+              </a:ext>
+            </a:extLst>
+          </p:cNvPr>
+          <p:cNvSpPr>
+            <a:spLocks noGrp="1"/>
+          </p:cNvSpPr>
+          <p:nvPr>
+            <p:ph sz="quarter" idx="1"/>
+          </p:nvPr>
+        </p:nvSpPr>
+        <p:spPr/>
+        <p:txBody>
+          <a:bodyPr>
+            <a:normAutofit lnSpcReduction="10000"/>
+          </a:bodyPr>
+          <a:lstStyle/>
+          <a:p>
+            <a:r>
+              <a:rPr lang="en-US" sz="2000" dirty="0"/>
+              <a:t>⚙️ </a:t>
+            </a:r>
+            <a:r>
+              <a:rPr lang="en-US" sz="2000" b="1" dirty="0"/>
+              <a:t>3. Strong Integration and Extensibility</a:t>
+            </a:r>
+          </a:p>
+          <a:p>
+            <a:r>
+              <a:rPr lang="en-US" sz="1800" dirty="0"/>
+              <a:t>Integrates with tools like </a:t>
+            </a:r>
+            <a:r>
+              <a:rPr lang="en-US" sz="1800" b="1" dirty="0"/>
+              <a:t>GitHub, Slack, Docker, Kubernetes, Jenkins</a:t>
+            </a:r>
+            <a:r>
+              <a:rPr lang="en-US" sz="1800" dirty="0"/>
+              <a:t>, etc.</a:t>
+            </a:r>
+            <a:endParaRPr lang="en-US" sz="1800" b="1" dirty="0"/>
+          </a:p>
+          <a:p>
+            <a:r>
+              <a:rPr lang="en-US" sz="1800" dirty="0"/>
+              <a:t>Over 1000 extensions available in the </a:t>
+            </a:r>
+            <a:r>
+              <a:rPr lang="en-US" sz="1800" b="1" dirty="0"/>
+              <a:t>Azure DevOps Marketplace</a:t>
+            </a:r>
+            <a:r>
+              <a:rPr lang="en-US" sz="1800" dirty="0"/>
+              <a:t>.</a:t>
+            </a:r>
+          </a:p>
+          <a:p>
+            <a:r>
+              <a:rPr lang="en-US" sz="2000" b="1" dirty="0"/>
+              <a:t>📊 4. Enterprise-Ready</a:t>
+            </a:r>
+          </a:p>
+          <a:p>
+            <a:r>
+              <a:rPr lang="en-US" sz="1800" dirty="0"/>
+              <a:t>Backed by Microsoft’s </a:t>
+            </a:r>
+            <a:r>
+              <a:rPr lang="en-US" sz="1800" b="1" dirty="0"/>
+              <a:t>cloud infrastructure</a:t>
+            </a:r>
+            <a:r>
+              <a:rPr lang="en-US" sz="1800" dirty="0"/>
+              <a:t> for scalability and security.</a:t>
+            </a:r>
+          </a:p>
+          <a:p>
+            <a:r>
+              <a:rPr lang="en-US" sz="1800" dirty="0"/>
+              <a:t>Suitable for </a:t>
+            </a:r>
+            <a:r>
+              <a:rPr lang="en-US" sz="1800" b="1" dirty="0"/>
+              <a:t>small teams to large enterprises</a:t>
+            </a:r>
+            <a:r>
+              <a:rPr lang="en-US" sz="1800" dirty="0"/>
+              <a:t>.</a:t>
+            </a:r>
+          </a:p>
+          <a:p>
+            <a:r>
+              <a:rPr lang="en-US" sz="2000" b="1" dirty="0"/>
+              <a:t>🚀 5. Agile and DevOps Practices Out-of-the-Box</a:t>
+            </a:r>
+          </a:p>
+          <a:p>
+            <a:r>
+              <a:rPr lang="en-US" sz="1800" dirty="0"/>
+              <a:t>First-class support for </a:t>
+            </a:r>
+            <a:r>
+              <a:rPr lang="en-US" sz="1800" b="1" dirty="0"/>
+              <a:t>Agile</a:t>
+            </a:r>
+            <a:r>
+              <a:rPr lang="en-US" sz="1800" dirty="0"/>
+              <a:t>, </a:t>
+            </a:r>
+            <a:r>
+              <a:rPr lang="en-US" sz="1800" b="1" dirty="0"/>
+              <a:t>Scrum</a:t>
+            </a:r>
+            <a:r>
+              <a:rPr lang="en-US" sz="1800" dirty="0"/>
+              <a:t>, and </a:t>
+            </a:r>
+            <a:r>
+              <a:rPr lang="en-US" sz="1800" b="1" dirty="0"/>
+              <a:t>Kanban</a:t>
+            </a:r>
+            <a:r>
+              <a:rPr lang="en-US" sz="1800" dirty="0"/>
+              <a:t> methodologies.</a:t>
+            </a:r>
+            <a:endParaRPr lang="en-US" sz="1800" b="1" dirty="0"/>
+          </a:p>
+          <a:p>
+            <a:r>
+              <a:rPr lang="en-US" sz="1800" dirty="0"/>
+              <a:t>Built-in </a:t>
+            </a:r>
+            <a:r>
+              <a:rPr lang="en-US" sz="1800" b="1" dirty="0"/>
+              <a:t>CI/CD pipelines</a:t>
+            </a:r>
+            <a:r>
+              <a:rPr lang="en-US" sz="1800" dirty="0"/>
+              <a:t> for automating the software lifecycle.</a:t>
+            </a:r>
+            <a:endParaRPr lang="en-US" sz="1800" b="1" dirty="0"/>
+          </a:p>
+          <a:p>
+            <a:r>
+              <a:rPr lang="en-US" sz="1800" dirty="0"/>
+              <a:t>Encourages a culture of </a:t>
+            </a:r>
+            <a:r>
+              <a:rPr lang="en-US" sz="1800" b="1" dirty="0"/>
+              <a:t>collaboration and continuous improvement</a:t>
+            </a:r>
+            <a:r>
+              <a:rPr lang="en-US" sz="1800" dirty="0"/>
+              <a:t>.</a:t>
+            </a:r>
+          </a:p>
+          <a:p>
+            <a:r>
+              <a:rPr lang="en-US" sz="2000" dirty="0"/>
+              <a:t>💰 </a:t>
+            </a:r>
+            <a:r>
+              <a:rPr lang="en-US" sz="2000" b="1" dirty="0"/>
+              <a:t>6. Cost-Effective and Flexible Pricing</a:t>
+            </a:r>
+          </a:p>
+          <a:p>
+            <a:r>
+              <a:rPr lang="en-US" sz="1800" dirty="0"/>
+              <a:t>Free tier for small teams (up to 5 users).</a:t>
+            </a:r>
+          </a:p>
+          <a:p>
+            <a:r>
+              <a:rPr lang="en-US" sz="1800" dirty="0"/>
+              <a:t>Pay-as-you-go model for larger teams.</a:t>
+            </a:r>
+            <a:endParaRPr lang="en-US" sz="1800" b="1" dirty="0"/>
+          </a:p>
+          <a:p>
+            <a:endParaRPr lang="en-US" sz="1800" b="1" dirty="0"/>
+          </a:p>
+          <a:p>
+            <a:pPr marL="0" indent="0">
+              <a:buNone/>
+            </a:pPr>
+            <a:endParaRPr lang="en-US" sz="1600" b="1" dirty="0"/>
+          </a:p>
+          <a:p>
+            <a:pPr marL="0" indent="0">
+              <a:buNone/>
+            </a:pPr>
+            <a:endParaRPr lang="en-US" sz="1600" dirty="0">
+              <a:cs typeface="Segoe UI" panose="020B0502040204020203" pitchFamily="34" charset="0"/>
+            </a:endParaRPr>
+          </a:p>
+          <a:p>
+            <a:endParaRPr lang="en-IN" sz="1600" dirty="0">
+              <a:cs typeface="Segoe UI" panose="020B0502040204020203" pitchFamily="34" charset="0"/>
+            </a:endParaRPr>
+          </a:p>
+          <a:p>
+            <a:endParaRPr lang="en-IN" sz="1600" dirty="0">
+              <a:cs typeface="Segoe UI" panose="020B0502040204020203" pitchFamily="34" charset="0"/>
+            </a:endParaRPr>
+          </a:p>
+        </p:txBody>
+      </p:sp>
+    </p:spTree>
+    <p:extLst>
+      <p:ext uri="{BB962C8B-B14F-4D97-AF65-F5344CB8AC3E}">
+        <p14:creationId xmlns:p14="http://schemas.microsoft.com/office/powerpoint/2010/main" val="3198287791"/>
+      </p:ext>
+    </p:extLst>
+  </p:cSld>
+  <p:clrMapOvr>
+    <a:masterClrMapping/>
+  </p:clrMapOvr>
+</p:sld>
+</file>
+
+<file path=ppt/slides/slide4.xml><?xml version="1.0" encoding="utf-8"?>
 <p:sld xmlns:a="http://schemas.openxmlformats.org/drawingml/2006/main" xmlns:r="http://schemas.openxmlformats.org/officeDocument/2006/relationships" xmlns:p="http://schemas.openxmlformats.org/presentationml/2006/main">
   <p:cSld>
     <p:spTree>
@@ -8315,60 +8220,36 @@
           <a:lstStyle/>
           <a:p>
             <a:r>
+              <a:rPr lang="en-US" sz="2000" b="1" dirty="0"/>
+              <a:t>Cloud &amp; On-Prem Support</a:t>
+            </a:r>
+            <a:r>
               <a:rPr lang="en-US" sz="2000" dirty="0"/>
-              <a:t>Fully </a:t>
-            </a:r>
+              <a:t> → Use Azure DevOps Services or Server.</a:t>
+            </a:r>
+          </a:p>
+          <a:p>
             <a:r>
               <a:rPr lang="en-US" sz="2000" b="1" dirty="0"/>
-              <a:t>integrated with GitHub</a:t>
+              <a:t>Integrations</a:t>
             </a:r>
             <a:r>
               <a:rPr lang="en-US" sz="2000" dirty="0"/>
-              <a:t>, Visual Studio, and other tools.</a:t>
+              <a:t> → GitHub, Jira, Slack, Teams, Docker, Jenkins.</a:t>
             </a:r>
           </a:p>
           <a:p>
             <a:r>
               <a:rPr lang="en-US" sz="2000" b="1" dirty="0"/>
-              <a:t>Cloud-based</a:t>
+              <a:t>Scalability</a:t>
             </a:r>
             <a:r>
               <a:rPr lang="en-US" sz="2000" dirty="0"/>
-              <a:t> and </a:t>
-            </a:r>
-            <a:r>
-              <a:rPr lang="en-US" sz="2000" b="1" dirty="0"/>
-              <a:t>scalable</a:t>
-            </a:r>
-            <a:r>
-              <a:rPr lang="en-US" sz="2000" dirty="0"/>
-              <a:t>, but also available on-premises as Azure DevOps Server.</a:t>
-            </a:r>
-          </a:p>
-          <a:p>
-            <a:r>
-              <a:rPr lang="en-US" sz="2000" dirty="0"/>
-              <a:t>Promotes </a:t>
-            </a:r>
-            <a:r>
-              <a:rPr lang="en-US" sz="2000" b="1" dirty="0"/>
-              <a:t>collaboration</a:t>
-            </a:r>
-            <a:r>
-              <a:rPr lang="en-US" sz="2000" dirty="0"/>
-              <a:t>, </a:t>
-            </a:r>
-            <a:r>
-              <a:rPr lang="en-US" sz="2000" b="1" dirty="0"/>
-              <a:t>automation</a:t>
-            </a:r>
-            <a:r>
-              <a:rPr lang="en-US" sz="2000" dirty="0"/>
-              <a:t>, and </a:t>
-            </a:r>
-            <a:r>
-              <a:rPr lang="en-US" sz="2000" b="1" dirty="0"/>
-              <a:t>agile workflows</a:t>
+              <a:t> → Works for a single developer or thousands of </a:t>
+            </a:r>
+            <a:r>
+              <a:rPr lang="en-US" sz="2000" dirty="0" err="1"/>
+              <a:t>devs</a:t>
             </a:r>
             <a:r>
               <a:rPr lang="en-US" sz="2000" dirty="0"/>
@@ -8378,24 +8259,48 @@
           <a:p>
             <a:r>
               <a:rPr lang="en-US" sz="2000" b="1" dirty="0"/>
-              <a:t>End-to-end toolchain</a:t>
+              <a:t>Security</a:t>
             </a:r>
             <a:r>
               <a:rPr lang="en-US" sz="2000" dirty="0"/>
-              <a:t> for DevOps.</a:t>
-            </a:r>
-            <a:endParaRPr lang="en-US" sz="2000" dirty="0">
-              <a:latin typeface="Segoe UI" panose="020B0502040204020203" pitchFamily="34" charset="0"/>
-              <a:cs typeface="Segoe UI" panose="020B0502040204020203" pitchFamily="34" charset="0"/>
-            </a:endParaRPr>
-          </a:p>
-          <a:p>
-            <a:endParaRPr lang="en-US" sz="2000" dirty="0">
-              <a:latin typeface="Segoe UI" panose="020B0502040204020203" pitchFamily="34" charset="0"/>
-              <a:cs typeface="Segoe UI" panose="020B0502040204020203" pitchFamily="34" charset="0"/>
-            </a:endParaRPr>
-          </a:p>
-          <a:p>
+              <a:t> → Role-based access, branch policies, and audit logs.</a:t>
+            </a:r>
+          </a:p>
+          <a:p>
+            <a:r>
+              <a:rPr lang="en-US" sz="2000" b="1" dirty="0"/>
+              <a:t>Typical Use Cases</a:t>
+            </a:r>
+          </a:p>
+          <a:p>
+            <a:r>
+              <a:rPr lang="en-US" sz="2000" dirty="0"/>
+              <a:t>Managing Agile projects with boards &amp; sprints.</a:t>
+            </a:r>
+          </a:p>
+          <a:p>
+            <a:r>
+              <a:rPr lang="en-US" sz="2000" dirty="0"/>
+              <a:t>Hosting code in private Git repos.</a:t>
+            </a:r>
+          </a:p>
+          <a:p>
+            <a:r>
+              <a:rPr lang="en-US" sz="2000" dirty="0"/>
+              <a:t>Building and deploying .NET, Java, Python, Node.js, etc.</a:t>
+            </a:r>
+          </a:p>
+          <a:p>
+            <a:r>
+              <a:rPr lang="en-US" sz="2000" dirty="0"/>
+              <a:t>Running automated tests before deployment.</a:t>
+            </a:r>
+          </a:p>
+          <a:p>
+            <a:r>
+              <a:rPr lang="en-US" sz="2000" dirty="0"/>
+              <a:t>Managing private package feeds for internal apps.</a:t>
+            </a:r>
             <a:endParaRPr lang="en-IN" sz="2000" dirty="0">
               <a:latin typeface="Segoe UI" panose="020B0502040204020203" pitchFamily="34" charset="0"/>
               <a:cs typeface="Segoe UI" panose="020B0502040204020203" pitchFamily="34" charset="0"/>
@@ -8416,7 +8321,7 @@
 </p:sld>
 </file>
 
-<file path=ppt/slides/slide4.xml><?xml version="1.0" encoding="utf-8"?>
+<file path=ppt/slides/slide5.xml><?xml version="1.0" encoding="utf-8"?>
 <p:sld xmlns:a="http://schemas.openxmlformats.org/drawingml/2006/main" xmlns:r="http://schemas.openxmlformats.org/officeDocument/2006/relationships" xmlns:p="http://schemas.openxmlformats.org/presentationml/2006/main">
   <p:cSld>
     <p:spTree>
@@ -9324,673 +9229,7 @@
 </p:sld>
 </file>
 
-<file path=ppt/slides/slide5.xml><?xml version="1.0" encoding="utf-8"?>
-<p:sld xmlns:a="http://schemas.openxmlformats.org/drawingml/2006/main" xmlns:r="http://schemas.openxmlformats.org/officeDocument/2006/relationships" xmlns:p="http://schemas.openxmlformats.org/presentationml/2006/main">
-  <p:cSld>
-    <p:spTree>
-      <p:nvGrpSpPr>
-        <p:cNvPr id="1" name="">
-          <a:extLst>
-            <a:ext uri="{FF2B5EF4-FFF2-40B4-BE49-F238E27FC236}">
-              <a16:creationId xmlns:a16="http://schemas.microsoft.com/office/drawing/2014/main" id="{AA9F84D1-4E22-D0D4-5EDF-53D24CF099E3}"/>
-            </a:ext>
-          </a:extLst>
-        </p:cNvPr>
-        <p:cNvGrpSpPr/>
-        <p:nvPr/>
-      </p:nvGrpSpPr>
-      <p:grpSpPr>
-        <a:xfrm>
-          <a:off x="0" y="0"/>
-          <a:ext cx="0" cy="0"/>
-          <a:chOff x="0" y="0"/>
-          <a:chExt cx="0" cy="0"/>
-        </a:xfrm>
-      </p:grpSpPr>
-      <p:sp>
-        <p:nvSpPr>
-          <p:cNvPr id="4" name="Title 3">
-            <a:extLst>
-              <a:ext uri="{FF2B5EF4-FFF2-40B4-BE49-F238E27FC236}">
-                <a16:creationId xmlns:a16="http://schemas.microsoft.com/office/drawing/2014/main" id="{EB11A352-2F99-F74E-BBB4-8A6FFFDA0062}"/>
-              </a:ext>
-            </a:extLst>
-          </p:cNvPr>
-          <p:cNvSpPr>
-            <a:spLocks noGrp="1"/>
-          </p:cNvSpPr>
-          <p:nvPr>
-            <p:ph type="title"/>
-          </p:nvPr>
-        </p:nvSpPr>
-        <p:spPr/>
-        <p:txBody>
-          <a:bodyPr>
-            <a:normAutofit/>
-          </a:bodyPr>
-          <a:lstStyle/>
-          <a:p>
-            <a:r>
-              <a:rPr lang="en-US" sz="2400" dirty="0"/>
-              <a:t>Use Cases</a:t>
-            </a:r>
-            <a:endParaRPr lang="en-IN" sz="2400" dirty="0"/>
-          </a:p>
-        </p:txBody>
-      </p:sp>
-      <p:sp>
-        <p:nvSpPr>
-          <p:cNvPr id="5" name="Content Placeholder 4">
-            <a:extLst>
-              <a:ext uri="{FF2B5EF4-FFF2-40B4-BE49-F238E27FC236}">
-                <a16:creationId xmlns:a16="http://schemas.microsoft.com/office/drawing/2014/main" id="{96E4B7D0-428A-82EC-8EFC-601DDAEC9C43}"/>
-              </a:ext>
-            </a:extLst>
-          </p:cNvPr>
-          <p:cNvSpPr>
-            <a:spLocks noGrp="1"/>
-          </p:cNvSpPr>
-          <p:nvPr>
-            <p:ph sz="quarter" idx="1"/>
-          </p:nvPr>
-        </p:nvSpPr>
-        <p:spPr/>
-        <p:txBody>
-          <a:bodyPr>
-            <a:normAutofit/>
-          </a:bodyPr>
-          <a:lstStyle/>
-          <a:p>
-            <a:r>
-              <a:rPr lang="en-US" sz="1800" dirty="0">
-                <a:cs typeface="Segoe UI" panose="020B0502040204020203" pitchFamily="34" charset="0"/>
-              </a:rPr>
-              <a:t>Automating builds and deployments with pipelines.</a:t>
-            </a:r>
-          </a:p>
-          <a:p>
-            <a:r>
-              <a:rPr lang="en-US" sz="1800" dirty="0"/>
-              <a:t>Managing agile development with sprints and boards.</a:t>
-            </a:r>
-          </a:p>
-          <a:p>
-            <a:r>
-              <a:rPr lang="en-US" sz="1800" dirty="0"/>
-              <a:t>Performing code reviews and branching strategies.</a:t>
-            </a:r>
-          </a:p>
-          <a:p>
-            <a:r>
-              <a:rPr lang="en-US" sz="1800" dirty="0"/>
-              <a:t>Hosting and managing project repositories.</a:t>
-            </a:r>
-            <a:endParaRPr lang="en-US" sz="1800" dirty="0">
-              <a:cs typeface="Segoe UI" panose="020B0502040204020203" pitchFamily="34" charset="0"/>
-            </a:endParaRPr>
-          </a:p>
-          <a:p>
-            <a:endParaRPr lang="en-US" sz="1800" dirty="0">
-              <a:cs typeface="Segoe UI" panose="020B0502040204020203" pitchFamily="34" charset="0"/>
-            </a:endParaRPr>
-          </a:p>
-          <a:p>
-            <a:endParaRPr lang="en-IN" sz="1800" dirty="0">
-              <a:cs typeface="Segoe UI" panose="020B0502040204020203" pitchFamily="34" charset="0"/>
-            </a:endParaRPr>
-          </a:p>
-          <a:p>
-            <a:endParaRPr lang="en-IN" sz="1800" dirty="0">
-              <a:cs typeface="Segoe UI" panose="020B0502040204020203" pitchFamily="34" charset="0"/>
-            </a:endParaRPr>
-          </a:p>
-        </p:txBody>
-      </p:sp>
-    </p:spTree>
-    <p:extLst>
-      <p:ext uri="{BB962C8B-B14F-4D97-AF65-F5344CB8AC3E}">
-        <p14:creationId xmlns:p14="http://schemas.microsoft.com/office/powerpoint/2010/main" val="2849809216"/>
-      </p:ext>
-    </p:extLst>
-  </p:cSld>
-  <p:clrMapOvr>
-    <a:masterClrMapping/>
-  </p:clrMapOvr>
-</p:sld>
-</file>
-
 <file path=ppt/slides/slide6.xml><?xml version="1.0" encoding="utf-8"?>
-<p:sld xmlns:a="http://schemas.openxmlformats.org/drawingml/2006/main" xmlns:r="http://schemas.openxmlformats.org/officeDocument/2006/relationships" xmlns:p="http://schemas.openxmlformats.org/presentationml/2006/main">
-  <p:cSld>
-    <p:spTree>
-      <p:nvGrpSpPr>
-        <p:cNvPr id="1" name="">
-          <a:extLst>
-            <a:ext uri="{FF2B5EF4-FFF2-40B4-BE49-F238E27FC236}">
-              <a16:creationId xmlns:a16="http://schemas.microsoft.com/office/drawing/2014/main" id="{D7131B5C-8AA5-647F-035F-6C59E17855ED}"/>
-            </a:ext>
-          </a:extLst>
-        </p:cNvPr>
-        <p:cNvGrpSpPr/>
-        <p:nvPr/>
-      </p:nvGrpSpPr>
-      <p:grpSpPr>
-        <a:xfrm>
-          <a:off x="0" y="0"/>
-          <a:ext cx="0" cy="0"/>
-          <a:chOff x="0" y="0"/>
-          <a:chExt cx="0" cy="0"/>
-        </a:xfrm>
-      </p:grpSpPr>
-      <p:sp>
-        <p:nvSpPr>
-          <p:cNvPr id="4" name="Title 3">
-            <a:extLst>
-              <a:ext uri="{FF2B5EF4-FFF2-40B4-BE49-F238E27FC236}">
-                <a16:creationId xmlns:a16="http://schemas.microsoft.com/office/drawing/2014/main" id="{71C52590-310C-DC5E-5E9C-A5DD20722A0A}"/>
-              </a:ext>
-            </a:extLst>
-          </p:cNvPr>
-          <p:cNvSpPr>
-            <a:spLocks noGrp="1"/>
-          </p:cNvSpPr>
-          <p:nvPr>
-            <p:ph type="title"/>
-          </p:nvPr>
-        </p:nvSpPr>
-        <p:spPr/>
-        <p:txBody>
-          <a:bodyPr>
-            <a:normAutofit/>
-          </a:bodyPr>
-          <a:lstStyle/>
-          <a:p>
-            <a:r>
-              <a:rPr lang="en-US" sz="2400" dirty="0"/>
-              <a:t>Why Choose Azure DevOps?</a:t>
-            </a:r>
-            <a:endParaRPr lang="en-IN" sz="2400" dirty="0"/>
-          </a:p>
-        </p:txBody>
-      </p:sp>
-      <p:sp>
-        <p:nvSpPr>
-          <p:cNvPr id="5" name="Content Placeholder 4">
-            <a:extLst>
-              <a:ext uri="{FF2B5EF4-FFF2-40B4-BE49-F238E27FC236}">
-                <a16:creationId xmlns:a16="http://schemas.microsoft.com/office/drawing/2014/main" id="{7FE04D8C-D5FF-9448-AC37-93E18DAB2377}"/>
-              </a:ext>
-            </a:extLst>
-          </p:cNvPr>
-          <p:cNvSpPr>
-            <a:spLocks noGrp="1"/>
-          </p:cNvSpPr>
-          <p:nvPr>
-            <p:ph sz="quarter" idx="1"/>
-          </p:nvPr>
-        </p:nvSpPr>
-        <p:spPr/>
-        <p:txBody>
-          <a:bodyPr>
-            <a:normAutofit fontScale="92500" lnSpcReduction="10000"/>
-          </a:bodyPr>
-          <a:lstStyle/>
-          <a:p>
-            <a:r>
-              <a:rPr lang="en-US" sz="1800" dirty="0">
-                <a:cs typeface="Segoe UI" panose="020B0502040204020203" pitchFamily="34" charset="0"/>
-              </a:rPr>
-              <a:t>Azure DevOps stands out as a comprehensive and flexible platform for modern software development teams.</a:t>
-            </a:r>
-          </a:p>
-          <a:p>
-            <a:r>
-              <a:rPr lang="en-US" sz="1800" dirty="0"/>
-              <a:t>Here are the key reasons why organizations choose Azure DevOps:</a:t>
-            </a:r>
-          </a:p>
-          <a:p>
-            <a:r>
-              <a:rPr lang="en-US" sz="1400" dirty="0"/>
-              <a:t>🌐 </a:t>
-            </a:r>
-            <a:r>
-              <a:rPr lang="en-US" sz="1400" b="1" dirty="0"/>
-              <a:t>1. </a:t>
-            </a:r>
-            <a:r>
-              <a:rPr lang="en-US" sz="2000" b="1" dirty="0"/>
-              <a:t>All-in-One DevOps Platform</a:t>
-            </a:r>
-            <a:endParaRPr lang="en-US" sz="2000" b="1" dirty="0">
-              <a:cs typeface="Segoe UI" panose="020B0502040204020203" pitchFamily="34" charset="0"/>
-            </a:endParaRPr>
-          </a:p>
-          <a:p>
-            <a:pPr lvl="1"/>
-            <a:r>
-              <a:rPr lang="en-US" sz="1800" dirty="0"/>
-              <a:t>Azure DevOps offers a </a:t>
-            </a:r>
-            <a:r>
-              <a:rPr lang="en-US" sz="1800" b="1" dirty="0"/>
-              <a:t>complete toolchain</a:t>
-            </a:r>
-            <a:r>
-              <a:rPr lang="en-US" sz="1800" dirty="0"/>
-              <a:t> for software development and delivery:</a:t>
-            </a:r>
-          </a:p>
-          <a:p>
-            <a:pPr lvl="2"/>
-            <a:r>
-              <a:rPr lang="en-US" sz="1800" dirty="0"/>
-              <a:t>Planning (Azure Boards)</a:t>
-            </a:r>
-          </a:p>
-          <a:p>
-            <a:pPr lvl="2"/>
-            <a:r>
-              <a:rPr lang="en-US" sz="1800" dirty="0"/>
-              <a:t>Development (Azure Repos)</a:t>
-            </a:r>
-          </a:p>
-          <a:p>
-            <a:pPr lvl="2"/>
-            <a:r>
-              <a:rPr lang="en-US" sz="1800" dirty="0"/>
-              <a:t>Testing (Azure Test Plans)</a:t>
-            </a:r>
-          </a:p>
-          <a:p>
-            <a:pPr lvl="2"/>
-            <a:r>
-              <a:rPr lang="en-US" sz="1800" dirty="0"/>
-              <a:t>Delivery (Azure Pipelines)</a:t>
-            </a:r>
-          </a:p>
-          <a:p>
-            <a:pPr lvl="2"/>
-            <a:r>
-              <a:rPr lang="en-US" sz="1800" dirty="0"/>
-              <a:t>Package Management (Azure Artifacts)</a:t>
-            </a:r>
-          </a:p>
-          <a:p>
-            <a:pPr lvl="1"/>
-            <a:r>
-              <a:rPr lang="en-US" sz="1800" dirty="0"/>
-              <a:t>This reduces the need to integrate and manage multiple third-party tools.</a:t>
-            </a:r>
-          </a:p>
-          <a:p>
-            <a:r>
-              <a:rPr lang="en-US" sz="2000" dirty="0"/>
-              <a:t>🔁 </a:t>
-            </a:r>
-            <a:r>
-              <a:rPr lang="en-US" sz="2000" b="1" dirty="0"/>
-              <a:t>2. Supports Any Language, Platform, or Cloud</a:t>
-            </a:r>
-          </a:p>
-          <a:p>
-            <a:pPr lvl="1"/>
-            <a:r>
-              <a:rPr lang="en-US" sz="1800" dirty="0"/>
-              <a:t>Works with </a:t>
-            </a:r>
-            <a:r>
-              <a:rPr lang="en-US" sz="1800" b="1" dirty="0"/>
-              <a:t>.NET, Java, Node.js, Python</a:t>
-            </a:r>
-            <a:r>
-              <a:rPr lang="en-US" sz="1800" dirty="0"/>
-              <a:t>, and more.</a:t>
-            </a:r>
-            <a:endParaRPr lang="en-US" sz="1800" b="1" dirty="0"/>
-          </a:p>
-          <a:p>
-            <a:pPr lvl="1"/>
-            <a:r>
-              <a:rPr lang="en-US" sz="1800" dirty="0"/>
-              <a:t>Supports building and deploying to </a:t>
-            </a:r>
-            <a:r>
-              <a:rPr lang="en-US" sz="1800" b="1" dirty="0"/>
-              <a:t>Windows, Linux, or macOS</a:t>
-            </a:r>
-            <a:r>
-              <a:rPr lang="en-US" sz="1800" dirty="0"/>
-              <a:t>.</a:t>
-            </a:r>
-            <a:endParaRPr lang="en-US" sz="1800" b="1" dirty="0"/>
-          </a:p>
-          <a:p>
-            <a:pPr lvl="1"/>
-            <a:r>
-              <a:rPr lang="en-US" sz="1800" dirty="0"/>
-              <a:t>Compatible with </a:t>
-            </a:r>
-            <a:r>
-              <a:rPr lang="en-US" sz="1800" b="1" dirty="0"/>
-              <a:t>Azure, AWS, GCP</a:t>
-            </a:r>
-            <a:r>
-              <a:rPr lang="en-US" sz="1800" dirty="0"/>
-              <a:t>, or on-premises environments.</a:t>
-            </a:r>
-          </a:p>
-          <a:p>
-            <a:endParaRPr lang="en-US" sz="1400" dirty="0">
-              <a:cs typeface="Segoe UI" panose="020B0502040204020203" pitchFamily="34" charset="0"/>
-            </a:endParaRPr>
-          </a:p>
-          <a:p>
-            <a:endParaRPr lang="en-IN" sz="1400" dirty="0">
-              <a:cs typeface="Segoe UI" panose="020B0502040204020203" pitchFamily="34" charset="0"/>
-            </a:endParaRPr>
-          </a:p>
-          <a:p>
-            <a:endParaRPr lang="en-IN" sz="1400" dirty="0">
-              <a:cs typeface="Segoe UI" panose="020B0502040204020203" pitchFamily="34" charset="0"/>
-            </a:endParaRPr>
-          </a:p>
-        </p:txBody>
-      </p:sp>
-    </p:spTree>
-    <p:extLst>
-      <p:ext uri="{BB962C8B-B14F-4D97-AF65-F5344CB8AC3E}">
-        <p14:creationId xmlns:p14="http://schemas.microsoft.com/office/powerpoint/2010/main" val="3164872179"/>
-      </p:ext>
-    </p:extLst>
-  </p:cSld>
-  <p:clrMapOvr>
-    <a:masterClrMapping/>
-  </p:clrMapOvr>
-</p:sld>
-</file>
-
-<file path=ppt/slides/slide7.xml><?xml version="1.0" encoding="utf-8"?>
-<p:sld xmlns:a="http://schemas.openxmlformats.org/drawingml/2006/main" xmlns:r="http://schemas.openxmlformats.org/officeDocument/2006/relationships" xmlns:p="http://schemas.openxmlformats.org/presentationml/2006/main">
-  <p:cSld>
-    <p:spTree>
-      <p:nvGrpSpPr>
-        <p:cNvPr id="1" name="">
-          <a:extLst>
-            <a:ext uri="{FF2B5EF4-FFF2-40B4-BE49-F238E27FC236}">
-              <a16:creationId xmlns:a16="http://schemas.microsoft.com/office/drawing/2014/main" id="{8807985E-FE68-5269-9BA0-F75B4938D8D3}"/>
-            </a:ext>
-          </a:extLst>
-        </p:cNvPr>
-        <p:cNvGrpSpPr/>
-        <p:nvPr/>
-      </p:nvGrpSpPr>
-      <p:grpSpPr>
-        <a:xfrm>
-          <a:off x="0" y="0"/>
-          <a:ext cx="0" cy="0"/>
-          <a:chOff x="0" y="0"/>
-          <a:chExt cx="0" cy="0"/>
-        </a:xfrm>
-      </p:grpSpPr>
-      <p:sp>
-        <p:nvSpPr>
-          <p:cNvPr id="4" name="Title 3">
-            <a:extLst>
-              <a:ext uri="{FF2B5EF4-FFF2-40B4-BE49-F238E27FC236}">
-                <a16:creationId xmlns:a16="http://schemas.microsoft.com/office/drawing/2014/main" id="{48F52263-FF32-05D7-5454-5BEBAAE637E9}"/>
-              </a:ext>
-            </a:extLst>
-          </p:cNvPr>
-          <p:cNvSpPr>
-            <a:spLocks noGrp="1"/>
-          </p:cNvSpPr>
-          <p:nvPr>
-            <p:ph type="title"/>
-          </p:nvPr>
-        </p:nvSpPr>
-        <p:spPr/>
-        <p:txBody>
-          <a:bodyPr>
-            <a:normAutofit/>
-          </a:bodyPr>
-          <a:lstStyle/>
-          <a:p>
-            <a:r>
-              <a:rPr lang="en-US" sz="2400" dirty="0"/>
-              <a:t>Why Choose Azure DevOps?</a:t>
-            </a:r>
-            <a:endParaRPr lang="en-IN" sz="2400" dirty="0"/>
-          </a:p>
-        </p:txBody>
-      </p:sp>
-      <p:sp>
-        <p:nvSpPr>
-          <p:cNvPr id="5" name="Content Placeholder 4">
-            <a:extLst>
-              <a:ext uri="{FF2B5EF4-FFF2-40B4-BE49-F238E27FC236}">
-                <a16:creationId xmlns:a16="http://schemas.microsoft.com/office/drawing/2014/main" id="{2A3DB246-39D0-0D39-7C0D-CF5C53C10AB6}"/>
-              </a:ext>
-            </a:extLst>
-          </p:cNvPr>
-          <p:cNvSpPr>
-            <a:spLocks noGrp="1"/>
-          </p:cNvSpPr>
-          <p:nvPr>
-            <p:ph sz="quarter" idx="1"/>
-          </p:nvPr>
-        </p:nvSpPr>
-        <p:spPr/>
-        <p:txBody>
-          <a:bodyPr>
-            <a:normAutofit lnSpcReduction="10000"/>
-          </a:bodyPr>
-          <a:lstStyle/>
-          <a:p>
-            <a:r>
-              <a:rPr lang="en-US" sz="2000" dirty="0"/>
-              <a:t>⚙️ </a:t>
-            </a:r>
-            <a:r>
-              <a:rPr lang="en-US" sz="2000" b="1" dirty="0"/>
-              <a:t>3. Strong Integration and Extensibility</a:t>
-            </a:r>
-          </a:p>
-          <a:p>
-            <a:r>
-              <a:rPr lang="en-US" sz="1800" dirty="0"/>
-              <a:t>Integrates with tools like </a:t>
-            </a:r>
-            <a:r>
-              <a:rPr lang="en-US" sz="1800" b="1" dirty="0"/>
-              <a:t>GitHub, Slack, Docker, Kubernetes, Jenkins</a:t>
-            </a:r>
-            <a:r>
-              <a:rPr lang="en-US" sz="1800" dirty="0"/>
-              <a:t>, etc.</a:t>
-            </a:r>
-            <a:endParaRPr lang="en-US" sz="1800" b="1" dirty="0"/>
-          </a:p>
-          <a:p>
-            <a:r>
-              <a:rPr lang="en-US" sz="1800" dirty="0"/>
-              <a:t>Over 1000 extensions available in the </a:t>
-            </a:r>
-            <a:r>
-              <a:rPr lang="en-US" sz="1800" b="1" dirty="0"/>
-              <a:t>Azure DevOps Marketplace</a:t>
-            </a:r>
-            <a:r>
-              <a:rPr lang="en-US" sz="1800" dirty="0"/>
-              <a:t>.</a:t>
-            </a:r>
-          </a:p>
-          <a:p>
-            <a:r>
-              <a:rPr lang="en-US" sz="2000" b="1" dirty="0"/>
-              <a:t>📊 4. Enterprise-Ready</a:t>
-            </a:r>
-          </a:p>
-          <a:p>
-            <a:r>
-              <a:rPr lang="en-US" sz="1800" dirty="0"/>
-              <a:t>Backed by Microsoft’s </a:t>
-            </a:r>
-            <a:r>
-              <a:rPr lang="en-US" sz="1800" b="1" dirty="0"/>
-              <a:t>cloud infrastructure</a:t>
-            </a:r>
-            <a:r>
-              <a:rPr lang="en-US" sz="1800" dirty="0"/>
-              <a:t> for scalability and security.</a:t>
-            </a:r>
-          </a:p>
-          <a:p>
-            <a:r>
-              <a:rPr lang="en-US" sz="1800" dirty="0"/>
-              <a:t>Suitable for </a:t>
-            </a:r>
-            <a:r>
-              <a:rPr lang="en-US" sz="1800" b="1" dirty="0"/>
-              <a:t>small teams to large enterprises</a:t>
-            </a:r>
-            <a:r>
-              <a:rPr lang="en-US" sz="1800" dirty="0"/>
-              <a:t>.</a:t>
-            </a:r>
-          </a:p>
-          <a:p>
-            <a:r>
-              <a:rPr lang="en-US" sz="2000" b="1" dirty="0"/>
-              <a:t>🚀 5. Agile and DevOps Practices Out-of-the-Box</a:t>
-            </a:r>
-          </a:p>
-          <a:p>
-            <a:r>
-              <a:rPr lang="en-US" sz="1800" dirty="0"/>
-              <a:t>First-class support for </a:t>
-            </a:r>
-            <a:r>
-              <a:rPr lang="en-US" sz="1800" b="1" dirty="0"/>
-              <a:t>Agile</a:t>
-            </a:r>
-            <a:r>
-              <a:rPr lang="en-US" sz="1800" dirty="0"/>
-              <a:t>, </a:t>
-            </a:r>
-            <a:r>
-              <a:rPr lang="en-US" sz="1800" b="1" dirty="0"/>
-              <a:t>Scrum</a:t>
-            </a:r>
-            <a:r>
-              <a:rPr lang="en-US" sz="1800" dirty="0"/>
-              <a:t>, and </a:t>
-            </a:r>
-            <a:r>
-              <a:rPr lang="en-US" sz="1800" b="1" dirty="0"/>
-              <a:t>Kanban</a:t>
-            </a:r>
-            <a:r>
-              <a:rPr lang="en-US" sz="1800" dirty="0"/>
-              <a:t> methodologies.</a:t>
-            </a:r>
-            <a:endParaRPr lang="en-US" sz="1800" b="1" dirty="0"/>
-          </a:p>
-          <a:p>
-            <a:r>
-              <a:rPr lang="en-US" sz="1800" dirty="0"/>
-              <a:t>Built-in </a:t>
-            </a:r>
-            <a:r>
-              <a:rPr lang="en-US" sz="1800" b="1" dirty="0"/>
-              <a:t>CI/CD pipelines</a:t>
-            </a:r>
-            <a:r>
-              <a:rPr lang="en-US" sz="1800" dirty="0"/>
-              <a:t> for automating the software lifecycle.</a:t>
-            </a:r>
-            <a:endParaRPr lang="en-US" sz="1800" b="1" dirty="0"/>
-          </a:p>
-          <a:p>
-            <a:r>
-              <a:rPr lang="en-US" sz="1800" dirty="0"/>
-              <a:t>Encourages a culture of </a:t>
-            </a:r>
-            <a:r>
-              <a:rPr lang="en-US" sz="1800" b="1" dirty="0"/>
-              <a:t>collaboration and continuous improvement</a:t>
-            </a:r>
-            <a:r>
-              <a:rPr lang="en-US" sz="1800" dirty="0"/>
-              <a:t>.</a:t>
-            </a:r>
-          </a:p>
-          <a:p>
-            <a:r>
-              <a:rPr lang="en-US" sz="2000" dirty="0"/>
-              <a:t>💰 </a:t>
-            </a:r>
-            <a:r>
-              <a:rPr lang="en-US" sz="2000" b="1" dirty="0"/>
-              <a:t>6. Cost-Effective and Flexible Pricing</a:t>
-            </a:r>
-          </a:p>
-          <a:p>
-            <a:r>
-              <a:rPr lang="en-US" sz="1800" dirty="0"/>
-              <a:t>Free tier for small teams (up to 5 users).</a:t>
-            </a:r>
-          </a:p>
-          <a:p>
-            <a:r>
-              <a:rPr lang="en-US" sz="1800" dirty="0"/>
-              <a:t>Pay-as-you-go model for larger teams.</a:t>
-            </a:r>
-            <a:endParaRPr lang="en-US" sz="1800" b="1" dirty="0"/>
-          </a:p>
-          <a:p>
-            <a:endParaRPr lang="en-US" sz="1800" b="1" dirty="0"/>
-          </a:p>
-          <a:p>
-            <a:pPr marL="0" indent="0">
-              <a:buNone/>
-            </a:pPr>
-            <a:endParaRPr lang="en-US" sz="1600" b="1" dirty="0"/>
-          </a:p>
-          <a:p>
-            <a:pPr marL="0" indent="0">
-              <a:buNone/>
-            </a:pPr>
-            <a:endParaRPr lang="en-US" sz="1600" dirty="0">
-              <a:cs typeface="Segoe UI" panose="020B0502040204020203" pitchFamily="34" charset="0"/>
-            </a:endParaRPr>
-          </a:p>
-          <a:p>
-            <a:endParaRPr lang="en-IN" sz="1600" dirty="0">
-              <a:cs typeface="Segoe UI" panose="020B0502040204020203" pitchFamily="34" charset="0"/>
-            </a:endParaRPr>
-          </a:p>
-          <a:p>
-            <a:endParaRPr lang="en-IN" sz="1600" dirty="0">
-              <a:cs typeface="Segoe UI" panose="020B0502040204020203" pitchFamily="34" charset="0"/>
-            </a:endParaRPr>
-          </a:p>
-        </p:txBody>
-      </p:sp>
-    </p:spTree>
-    <p:extLst>
-      <p:ext uri="{BB962C8B-B14F-4D97-AF65-F5344CB8AC3E}">
-        <p14:creationId xmlns:p14="http://schemas.microsoft.com/office/powerpoint/2010/main" val="2220039213"/>
-      </p:ext>
-    </p:extLst>
-  </p:cSld>
-  <p:clrMapOvr>
-    <a:masterClrMapping/>
-  </p:clrMapOvr>
-</p:sld>
-</file>
-
-<file path=ppt/slides/slide8.xml><?xml version="1.0" encoding="utf-8"?>
 <p:sld xmlns:a="http://schemas.openxmlformats.org/drawingml/2006/main" xmlns:r="http://schemas.openxmlformats.org/officeDocument/2006/relationships" xmlns:p="http://schemas.openxmlformats.org/presentationml/2006/main">
   <p:cSld>
     <p:spTree>
@@ -10123,7 +9362,7 @@
 </p:sld>
 </file>
 
-<file path=ppt/slides/slide9.xml><?xml version="1.0" encoding="utf-8"?>
+<file path=ppt/slides/slide7.xml><?xml version="1.0" encoding="utf-8"?>
 <p:sld xmlns:a="http://schemas.openxmlformats.org/drawingml/2006/main" xmlns:r="http://schemas.openxmlformats.org/officeDocument/2006/relationships" xmlns:p="http://schemas.openxmlformats.org/presentationml/2006/main">
   <p:cSld>
     <p:spTree>
@@ -10267,6 +9506,318 @@
     <p:extLst>
       <p:ext uri="{BB962C8B-B14F-4D97-AF65-F5344CB8AC3E}">
         <p14:creationId xmlns:p14="http://schemas.microsoft.com/office/powerpoint/2010/main" val="1176249902"/>
+      </p:ext>
+    </p:extLst>
+  </p:cSld>
+  <p:clrMapOvr>
+    <a:masterClrMapping/>
+  </p:clrMapOvr>
+</p:sld>
+</file>
+
+<file path=ppt/slides/slide8.xml><?xml version="1.0" encoding="utf-8"?>
+<p:sld xmlns:a="http://schemas.openxmlformats.org/drawingml/2006/main" xmlns:r="http://schemas.openxmlformats.org/officeDocument/2006/relationships" xmlns:p="http://schemas.openxmlformats.org/presentationml/2006/main">
+  <p:cSld>
+    <p:spTree>
+      <p:nvGrpSpPr>
+        <p:cNvPr id="1" name="">
+          <a:extLst>
+            <a:ext uri="{FF2B5EF4-FFF2-40B4-BE49-F238E27FC236}">
+              <a16:creationId xmlns:a16="http://schemas.microsoft.com/office/drawing/2014/main" id="{FD705075-583A-0D13-8510-DE97552EB3E9}"/>
+            </a:ext>
+          </a:extLst>
+        </p:cNvPr>
+        <p:cNvGrpSpPr/>
+        <p:nvPr/>
+      </p:nvGrpSpPr>
+      <p:grpSpPr>
+        <a:xfrm>
+          <a:off x="0" y="0"/>
+          <a:ext cx="0" cy="0"/>
+          <a:chOff x="0" y="0"/>
+          <a:chExt cx="0" cy="0"/>
+        </a:xfrm>
+      </p:grpSpPr>
+      <p:sp>
+        <p:nvSpPr>
+          <p:cNvPr id="4" name="Title 3">
+            <a:extLst>
+              <a:ext uri="{FF2B5EF4-FFF2-40B4-BE49-F238E27FC236}">
+                <a16:creationId xmlns:a16="http://schemas.microsoft.com/office/drawing/2014/main" id="{5040673A-2F8A-F842-EFD2-BC5D42D77241}"/>
+              </a:ext>
+            </a:extLst>
+          </p:cNvPr>
+          <p:cNvSpPr>
+            <a:spLocks noGrp="1"/>
+          </p:cNvSpPr>
+          <p:nvPr>
+            <p:ph type="title"/>
+          </p:nvPr>
+        </p:nvSpPr>
+        <p:spPr/>
+        <p:txBody>
+          <a:bodyPr>
+            <a:normAutofit/>
+          </a:bodyPr>
+          <a:lstStyle/>
+          <a:p>
+            <a:r>
+              <a:rPr lang="en-US" sz="2400" dirty="0"/>
+              <a:t>Key Services/Components in Azure DevOps</a:t>
+            </a:r>
+            <a:endParaRPr lang="en-IN" sz="2400" dirty="0"/>
+          </a:p>
+        </p:txBody>
+      </p:sp>
+      <p:sp>
+        <p:nvSpPr>
+          <p:cNvPr id="5" name="Content Placeholder 4">
+            <a:extLst>
+              <a:ext uri="{FF2B5EF4-FFF2-40B4-BE49-F238E27FC236}">
+                <a16:creationId xmlns:a16="http://schemas.microsoft.com/office/drawing/2014/main" id="{D6F922A6-B1EA-EC1A-901A-04D8C00A72F3}"/>
+              </a:ext>
+            </a:extLst>
+          </p:cNvPr>
+          <p:cNvSpPr>
+            <a:spLocks noGrp="1"/>
+          </p:cNvSpPr>
+          <p:nvPr>
+            <p:ph sz="quarter" idx="1"/>
+          </p:nvPr>
+        </p:nvSpPr>
+        <p:spPr/>
+        <p:txBody>
+          <a:bodyPr>
+            <a:normAutofit/>
+          </a:bodyPr>
+          <a:lstStyle/>
+          <a:p>
+            <a:r>
+              <a:rPr lang="en-US" sz="2000" b="1" dirty="0"/>
+              <a:t>2. Azure Repos</a:t>
+            </a:r>
+          </a:p>
+          <a:p>
+            <a:r>
+              <a:rPr lang="en-US" sz="1800" b="1" dirty="0"/>
+              <a:t>Purpose</a:t>
+            </a:r>
+            <a:r>
+              <a:rPr lang="en-US" sz="1800" dirty="0"/>
+              <a:t>: Source code management.</a:t>
+            </a:r>
+          </a:p>
+          <a:p>
+            <a:r>
+              <a:rPr lang="en-US" sz="1800" b="1" dirty="0"/>
+              <a:t>Features</a:t>
+            </a:r>
+            <a:r>
+              <a:rPr lang="en-US" sz="1800" dirty="0"/>
+              <a:t>:</a:t>
+            </a:r>
+          </a:p>
+          <a:p>
+            <a:r>
+              <a:rPr lang="en-US" sz="1800" dirty="0"/>
+              <a:t>Git repositories and Team Foundation Version Control (TFVC)</a:t>
+            </a:r>
+          </a:p>
+          <a:p>
+            <a:r>
+              <a:rPr lang="en-US" sz="1800" dirty="0"/>
+              <a:t>Pull requests and code reviews</a:t>
+            </a:r>
+          </a:p>
+          <a:p>
+            <a:r>
+              <a:rPr lang="en-US" sz="1800" dirty="0"/>
+              <a:t>Branching and merging strategies</a:t>
+            </a:r>
+          </a:p>
+          <a:p>
+            <a:r>
+              <a:rPr lang="en-US" sz="1800" dirty="0"/>
+              <a:t>Commit history and auditing</a:t>
+            </a:r>
+          </a:p>
+          <a:p>
+            <a:endParaRPr lang="en-IN" sz="1800" dirty="0">
+              <a:latin typeface="Segoe UI" panose="020B0502040204020203" pitchFamily="34" charset="0"/>
+              <a:cs typeface="Segoe UI" panose="020B0502040204020203" pitchFamily="34" charset="0"/>
+            </a:endParaRPr>
+          </a:p>
+          <a:p>
+            <a:endParaRPr lang="en-IN" sz="1800" dirty="0">
+              <a:latin typeface="Segoe UI" panose="020B0502040204020203" pitchFamily="34" charset="0"/>
+              <a:cs typeface="Segoe UI" panose="020B0502040204020203" pitchFamily="34" charset="0"/>
+            </a:endParaRPr>
+          </a:p>
+        </p:txBody>
+      </p:sp>
+    </p:spTree>
+    <p:extLst>
+      <p:ext uri="{BB962C8B-B14F-4D97-AF65-F5344CB8AC3E}">
+        <p14:creationId xmlns:p14="http://schemas.microsoft.com/office/powerpoint/2010/main" val="2281372155"/>
+      </p:ext>
+    </p:extLst>
+  </p:cSld>
+  <p:clrMapOvr>
+    <a:masterClrMapping/>
+  </p:clrMapOvr>
+</p:sld>
+</file>
+
+<file path=ppt/slides/slide9.xml><?xml version="1.0" encoding="utf-8"?>
+<p:sld xmlns:a="http://schemas.openxmlformats.org/drawingml/2006/main" xmlns:r="http://schemas.openxmlformats.org/officeDocument/2006/relationships" xmlns:p="http://schemas.openxmlformats.org/presentationml/2006/main">
+  <p:cSld>
+    <p:spTree>
+      <p:nvGrpSpPr>
+        <p:cNvPr id="1" name="">
+          <a:extLst>
+            <a:ext uri="{FF2B5EF4-FFF2-40B4-BE49-F238E27FC236}">
+              <a16:creationId xmlns:a16="http://schemas.microsoft.com/office/drawing/2014/main" id="{ACB718E6-6082-4DB8-5242-E999112A2292}"/>
+            </a:ext>
+          </a:extLst>
+        </p:cNvPr>
+        <p:cNvGrpSpPr/>
+        <p:nvPr/>
+      </p:nvGrpSpPr>
+      <p:grpSpPr>
+        <a:xfrm>
+          <a:off x="0" y="0"/>
+          <a:ext cx="0" cy="0"/>
+          <a:chOff x="0" y="0"/>
+          <a:chExt cx="0" cy="0"/>
+        </a:xfrm>
+      </p:grpSpPr>
+      <p:sp>
+        <p:nvSpPr>
+          <p:cNvPr id="4" name="Title 3">
+            <a:extLst>
+              <a:ext uri="{FF2B5EF4-FFF2-40B4-BE49-F238E27FC236}">
+                <a16:creationId xmlns:a16="http://schemas.microsoft.com/office/drawing/2014/main" id="{3E20B40D-9CCC-97D6-5D6B-1B53217AE34E}"/>
+              </a:ext>
+            </a:extLst>
+          </p:cNvPr>
+          <p:cNvSpPr>
+            <a:spLocks noGrp="1"/>
+          </p:cNvSpPr>
+          <p:nvPr>
+            <p:ph type="title"/>
+          </p:nvPr>
+        </p:nvSpPr>
+        <p:spPr/>
+        <p:txBody>
+          <a:bodyPr>
+            <a:normAutofit/>
+          </a:bodyPr>
+          <a:lstStyle/>
+          <a:p>
+            <a:r>
+              <a:rPr lang="en-US" sz="2400" dirty="0"/>
+              <a:t>Key Services/Components in Azure DevOps</a:t>
+            </a:r>
+            <a:endParaRPr lang="en-IN" sz="2400" dirty="0"/>
+          </a:p>
+        </p:txBody>
+      </p:sp>
+      <p:sp>
+        <p:nvSpPr>
+          <p:cNvPr id="5" name="Content Placeholder 4">
+            <a:extLst>
+              <a:ext uri="{FF2B5EF4-FFF2-40B4-BE49-F238E27FC236}">
+                <a16:creationId xmlns:a16="http://schemas.microsoft.com/office/drawing/2014/main" id="{FFBAA333-3F58-B9B1-6714-5634BC3CF4EB}"/>
+              </a:ext>
+            </a:extLst>
+          </p:cNvPr>
+          <p:cNvSpPr>
+            <a:spLocks noGrp="1"/>
+          </p:cNvSpPr>
+          <p:nvPr>
+            <p:ph sz="quarter" idx="1"/>
+          </p:nvPr>
+        </p:nvSpPr>
+        <p:spPr/>
+        <p:txBody>
+          <a:bodyPr>
+            <a:normAutofit/>
+          </a:bodyPr>
+          <a:lstStyle/>
+          <a:p>
+            <a:r>
+              <a:rPr lang="en-US" sz="2000" b="1" dirty="0"/>
+              <a:t>3. Azure Pipelines</a:t>
+            </a:r>
+          </a:p>
+          <a:p>
+            <a:r>
+              <a:rPr lang="en-US" sz="1800" b="1" dirty="0"/>
+              <a:t>Purpose</a:t>
+            </a:r>
+            <a:r>
+              <a:rPr lang="en-US" sz="1800" dirty="0"/>
+              <a:t>:  Continuous Integration (CI) and Continuous Delivery (CD).</a:t>
+            </a:r>
+          </a:p>
+          <a:p>
+            <a:r>
+              <a:rPr lang="en-US" sz="1800" b="1" dirty="0"/>
+              <a:t>Features</a:t>
+            </a:r>
+            <a:r>
+              <a:rPr lang="en-US" sz="1800" dirty="0"/>
+              <a:t>:</a:t>
+            </a:r>
+          </a:p>
+          <a:p>
+            <a:r>
+              <a:rPr lang="en-US" sz="1800" dirty="0"/>
+              <a:t>Build automation and deployment workflows</a:t>
+            </a:r>
+          </a:p>
+          <a:p>
+            <a:r>
+              <a:rPr lang="en-US" sz="1800" dirty="0"/>
+              <a:t>Multi-platform support (Windows, Linux, macOS)</a:t>
+            </a:r>
+          </a:p>
+          <a:p>
+            <a:r>
+              <a:rPr lang="en-US" sz="1800" dirty="0"/>
+              <a:t>Container and Kubernetes support</a:t>
+            </a:r>
+          </a:p>
+          <a:p>
+            <a:r>
+              <a:rPr lang="en-US" sz="1800" dirty="0"/>
+              <a:t>YAML or classic editor pipelines</a:t>
+            </a:r>
+          </a:p>
+          <a:p>
+            <a:r>
+              <a:rPr lang="en-US" sz="1800" dirty="0"/>
+              <a:t>Integration with GitHub, Bitbucket, etc.</a:t>
+            </a:r>
+          </a:p>
+          <a:p>
+            <a:endParaRPr lang="en-IN" sz="1800" dirty="0">
+              <a:latin typeface="Segoe UI" panose="020B0502040204020203" pitchFamily="34" charset="0"/>
+              <a:cs typeface="Segoe UI" panose="020B0502040204020203" pitchFamily="34" charset="0"/>
+            </a:endParaRPr>
+          </a:p>
+          <a:p>
+            <a:endParaRPr lang="en-IN" sz="1800" dirty="0">
+              <a:latin typeface="Segoe UI" panose="020B0502040204020203" pitchFamily="34" charset="0"/>
+              <a:cs typeface="Segoe UI" panose="020B0502040204020203" pitchFamily="34" charset="0"/>
+            </a:endParaRPr>
+          </a:p>
+        </p:txBody>
+      </p:sp>
+    </p:spTree>
+    <p:extLst>
+      <p:ext uri="{BB962C8B-B14F-4D97-AF65-F5344CB8AC3E}">
+        <p14:creationId xmlns:p14="http://schemas.microsoft.com/office/powerpoint/2010/main" val="2365816433"/>
       </p:ext>
     </p:extLst>
   </p:cSld>
